--- a/pptx-files/5.The.Lord.Is.My.Shepherd.pptx
+++ b/pptx-files/5.The.Lord.Is.My.Shepherd.pptx
@@ -16,13 +16,6 @@
     <p:sldId id="261" r:id="rId11"/>
     <p:sldId id="262" r:id="rId12"/>
     <p:sldId id="263" r:id="rId13"/>
-    <p:sldId id="264" r:id="rId14"/>
-    <p:sldId id="265" r:id="rId15"/>
-    <p:sldId id="266" r:id="rId16"/>
-    <p:sldId id="267" r:id="rId17"/>
-    <p:sldId id="268" r:id="rId18"/>
-    <p:sldId id="269" r:id="rId19"/>
-    <p:sldId id="270" r:id="rId20"/>
   </p:sldIdLst>
   <p:sldSz cy="6858000" cx="9144000"/>
   <p:notesSz cx="6858000" cy="9144000"/>
@@ -271,7 +264,7 @@
       </p15:sldGuideLst>
     </p:ext>
     <p:ext uri="GoogleSlidesCustomDataVersion2">
-      <go:slidesCustomData xmlns:go="http://customooxmlschemas.google.com/" r:id="rId21" roundtripDataSignature="AMtx7mgsQCeo6g4lflxXvuNHq+e9MawVNQ=="/>
+      <go:slidesCustomData xmlns:go="http://customooxmlschemas.google.com/" r:id="rId14" roundtripDataSignature="AMtx7miZdJTi5ktUbZYoyWVnm5TqcFiMoQ=="/>
     </p:ext>
   </p:extLst>
 </p:presentation>
@@ -955,708 +948,6 @@
 </p:notes>
 </file>
 
-<file path=ppt/notesSlides/notesSlide10.xml><?xml version="1.0" encoding="utf-8"?>
-<p:notes xmlns:a="http://schemas.openxmlformats.org/drawingml/2006/main" xmlns:r="http://schemas.openxmlformats.org/officeDocument/2006/relationships" xmlns:mc="http://schemas.openxmlformats.org/markup-compatibility/2006" xmlns:mv="urn:schemas-microsoft-com:mac:vml" xmlns:p="http://schemas.openxmlformats.org/presentationml/2006/main" xmlns:c="http://schemas.openxmlformats.org/drawingml/2006/chart" xmlns:dgm="http://schemas.openxmlformats.org/drawingml/2006/diagram" xmlns:o="urn:schemas-microsoft-com:office:office" xmlns:v="urn:schemas-microsoft-com:vml" xmlns:pvml="urn:schemas-microsoft-com:office:powerpoint" xmlns:com="http://schemas.openxmlformats.org/drawingml/2006/compatibility" xmlns:p14="http://schemas.microsoft.com/office/powerpoint/2010/main" xmlns:p15="http://schemas.microsoft.com/office/powerpoint/2012/main" xmlns:ahyp="http://schemas.microsoft.com/office/drawing/2018/hyperlinkcolor" showMasterPhAnim="0" showMasterSp="0">
-  <p:cSld>
-    <p:spTree>
-      <p:nvGrpSpPr>
-        <p:cNvPr id="69" name="Shape 69"/>
-        <p:cNvGrpSpPr/>
-        <p:nvPr/>
-      </p:nvGrpSpPr>
-      <p:grpSpPr>
-        <a:xfrm>
-          <a:off x="0" y="0"/>
-          <a:ext cx="0" cy="0"/>
-          <a:chOff x="0" y="0"/>
-          <a:chExt cx="0" cy="0"/>
-        </a:xfrm>
-      </p:grpSpPr>
-      <p:sp>
-        <p:nvSpPr>
-          <p:cNvPr id="70" name="Google Shape;70;g3ca1bd19589_0_53:notes"/>
-          <p:cNvSpPr txBox="1"/>
-          <p:nvPr>
-            <p:ph idx="1" type="body"/>
-          </p:nvPr>
-        </p:nvSpPr>
-        <p:spPr>
-          <a:xfrm>
-            <a:off x="685800" y="4343400"/>
-            <a:ext cx="5486400" cy="4114800"/>
-          </a:xfrm>
-          <a:prstGeom prst="rect">
-            <a:avLst/>
-          </a:prstGeom>
-          <a:noFill/>
-          <a:ln>
-            <a:noFill/>
-          </a:ln>
-        </p:spPr>
-        <p:txBody>
-          <a:bodyPr anchorCtr="0" anchor="t" bIns="91425" lIns="91425" spcFirstLastPara="1" rIns="91425" wrap="square" tIns="91425">
-            <a:noAutofit/>
-          </a:bodyPr>
-          <a:lstStyle/>
-          <a:p>
-            <a:pPr indent="0" lvl="0" marL="0" rtl="0" algn="l">
-              <a:lnSpc>
-                <a:spcPct val="100000"/>
-              </a:lnSpc>
-              <a:spcBef>
-                <a:spcPts val="0"/>
-              </a:spcBef>
-              <a:spcAft>
-                <a:spcPts val="0"/>
-              </a:spcAft>
-              <a:buSzPts val="1100"/>
-              <a:buNone/>
-            </a:pPr>
-            <a:r>
-              <a:t/>
-            </a:r>
-            <a:endParaRPr/>
-          </a:p>
-        </p:txBody>
-      </p:sp>
-      <p:sp>
-        <p:nvSpPr>
-          <p:cNvPr id="71" name="Google Shape;71;g3ca1bd19589_0_53:notes"/>
-          <p:cNvSpPr/>
-          <p:nvPr>
-            <p:ph idx="2" type="sldImg"/>
-          </p:nvPr>
-        </p:nvSpPr>
-        <p:spPr>
-          <a:xfrm>
-            <a:off x="1143225" y="685800"/>
-            <a:ext cx="4572300" cy="3429000"/>
-          </a:xfrm>
-          <a:custGeom>
-            <a:rect b="b" l="l" r="r" t="t"/>
-            <a:pathLst>
-              <a:path extrusionOk="0" h="120000" w="120000">
-                <a:moveTo>
-                  <a:pt x="0" y="0"/>
-                </a:moveTo>
-                <a:lnTo>
-                  <a:pt x="120000" y="0"/>
-                </a:lnTo>
-                <a:lnTo>
-                  <a:pt x="120000" y="120000"/>
-                </a:lnTo>
-                <a:lnTo>
-                  <a:pt x="0" y="120000"/>
-                </a:lnTo>
-                <a:close/>
-              </a:path>
-            </a:pathLst>
-          </a:custGeom>
-          <a:noFill/>
-          <a:ln cap="flat" cmpd="sng" w="9525">
-            <a:solidFill>
-              <a:srgbClr val="000000"/>
-            </a:solidFill>
-            <a:prstDash val="solid"/>
-            <a:round/>
-            <a:headEnd len="sm" w="sm" type="none"/>
-            <a:tailEnd len="sm" w="sm" type="none"/>
-          </a:ln>
-        </p:spPr>
-      </p:sp>
-    </p:spTree>
-  </p:cSld>
-  <p:clrMapOvr>
-    <a:masterClrMapping/>
-  </p:clrMapOvr>
-</p:notes>
-</file>
-
-<file path=ppt/notesSlides/notesSlide11.xml><?xml version="1.0" encoding="utf-8"?>
-<p:notes xmlns:a="http://schemas.openxmlformats.org/drawingml/2006/main" xmlns:r="http://schemas.openxmlformats.org/officeDocument/2006/relationships" xmlns:mc="http://schemas.openxmlformats.org/markup-compatibility/2006" xmlns:mv="urn:schemas-microsoft-com:mac:vml" xmlns:p="http://schemas.openxmlformats.org/presentationml/2006/main" xmlns:c="http://schemas.openxmlformats.org/drawingml/2006/chart" xmlns:dgm="http://schemas.openxmlformats.org/drawingml/2006/diagram" xmlns:o="urn:schemas-microsoft-com:office:office" xmlns:v="urn:schemas-microsoft-com:vml" xmlns:pvml="urn:schemas-microsoft-com:office:powerpoint" xmlns:com="http://schemas.openxmlformats.org/drawingml/2006/compatibility" xmlns:p14="http://schemas.microsoft.com/office/powerpoint/2010/main" xmlns:p15="http://schemas.microsoft.com/office/powerpoint/2012/main" xmlns:ahyp="http://schemas.microsoft.com/office/drawing/2018/hyperlinkcolor" showMasterPhAnim="0" showMasterSp="0">
-  <p:cSld>
-    <p:spTree>
-      <p:nvGrpSpPr>
-        <p:cNvPr id="74" name="Shape 74"/>
-        <p:cNvGrpSpPr/>
-        <p:nvPr/>
-      </p:nvGrpSpPr>
-      <p:grpSpPr>
-        <a:xfrm>
-          <a:off x="0" y="0"/>
-          <a:ext cx="0" cy="0"/>
-          <a:chOff x="0" y="0"/>
-          <a:chExt cx="0" cy="0"/>
-        </a:xfrm>
-      </p:grpSpPr>
-      <p:sp>
-        <p:nvSpPr>
-          <p:cNvPr id="75" name="Google Shape;75;g3ca1bd19589_0_57:notes"/>
-          <p:cNvSpPr txBox="1"/>
-          <p:nvPr>
-            <p:ph idx="1" type="body"/>
-          </p:nvPr>
-        </p:nvSpPr>
-        <p:spPr>
-          <a:xfrm>
-            <a:off x="685800" y="4343400"/>
-            <a:ext cx="5486400" cy="4114800"/>
-          </a:xfrm>
-          <a:prstGeom prst="rect">
-            <a:avLst/>
-          </a:prstGeom>
-          <a:noFill/>
-          <a:ln>
-            <a:noFill/>
-          </a:ln>
-        </p:spPr>
-        <p:txBody>
-          <a:bodyPr anchorCtr="0" anchor="t" bIns="91425" lIns="91425" spcFirstLastPara="1" rIns="91425" wrap="square" tIns="91425">
-            <a:noAutofit/>
-          </a:bodyPr>
-          <a:lstStyle/>
-          <a:p>
-            <a:pPr indent="0" lvl="0" marL="0" rtl="0" algn="l">
-              <a:lnSpc>
-                <a:spcPct val="100000"/>
-              </a:lnSpc>
-              <a:spcBef>
-                <a:spcPts val="0"/>
-              </a:spcBef>
-              <a:spcAft>
-                <a:spcPts val="0"/>
-              </a:spcAft>
-              <a:buSzPts val="1100"/>
-              <a:buNone/>
-            </a:pPr>
-            <a:r>
-              <a:t/>
-            </a:r>
-            <a:endParaRPr/>
-          </a:p>
-        </p:txBody>
-      </p:sp>
-      <p:sp>
-        <p:nvSpPr>
-          <p:cNvPr id="76" name="Google Shape;76;g3ca1bd19589_0_57:notes"/>
-          <p:cNvSpPr/>
-          <p:nvPr>
-            <p:ph idx="2" type="sldImg"/>
-          </p:nvPr>
-        </p:nvSpPr>
-        <p:spPr>
-          <a:xfrm>
-            <a:off x="1143225" y="685800"/>
-            <a:ext cx="4572300" cy="3429000"/>
-          </a:xfrm>
-          <a:custGeom>
-            <a:rect b="b" l="l" r="r" t="t"/>
-            <a:pathLst>
-              <a:path extrusionOk="0" h="120000" w="120000">
-                <a:moveTo>
-                  <a:pt x="0" y="0"/>
-                </a:moveTo>
-                <a:lnTo>
-                  <a:pt x="120000" y="0"/>
-                </a:lnTo>
-                <a:lnTo>
-                  <a:pt x="120000" y="120000"/>
-                </a:lnTo>
-                <a:lnTo>
-                  <a:pt x="0" y="120000"/>
-                </a:lnTo>
-                <a:close/>
-              </a:path>
-            </a:pathLst>
-          </a:custGeom>
-          <a:noFill/>
-          <a:ln cap="flat" cmpd="sng" w="9525">
-            <a:solidFill>
-              <a:srgbClr val="000000"/>
-            </a:solidFill>
-            <a:prstDash val="solid"/>
-            <a:round/>
-            <a:headEnd len="sm" w="sm" type="none"/>
-            <a:tailEnd len="sm" w="sm" type="none"/>
-          </a:ln>
-        </p:spPr>
-      </p:sp>
-    </p:spTree>
-  </p:cSld>
-  <p:clrMapOvr>
-    <a:masterClrMapping/>
-  </p:clrMapOvr>
-</p:notes>
-</file>
-
-<file path=ppt/notesSlides/notesSlide12.xml><?xml version="1.0" encoding="utf-8"?>
-<p:notes xmlns:a="http://schemas.openxmlformats.org/drawingml/2006/main" xmlns:r="http://schemas.openxmlformats.org/officeDocument/2006/relationships" xmlns:mc="http://schemas.openxmlformats.org/markup-compatibility/2006" xmlns:mv="urn:schemas-microsoft-com:mac:vml" xmlns:p="http://schemas.openxmlformats.org/presentationml/2006/main" xmlns:c="http://schemas.openxmlformats.org/drawingml/2006/chart" xmlns:dgm="http://schemas.openxmlformats.org/drawingml/2006/diagram" xmlns:o="urn:schemas-microsoft-com:office:office" xmlns:v="urn:schemas-microsoft-com:vml" xmlns:pvml="urn:schemas-microsoft-com:office:powerpoint" xmlns:com="http://schemas.openxmlformats.org/drawingml/2006/compatibility" xmlns:p14="http://schemas.microsoft.com/office/powerpoint/2010/main" xmlns:p15="http://schemas.microsoft.com/office/powerpoint/2012/main" xmlns:ahyp="http://schemas.microsoft.com/office/drawing/2018/hyperlinkcolor" showMasterPhAnim="0" showMasterSp="0">
-  <p:cSld>
-    <p:spTree>
-      <p:nvGrpSpPr>
-        <p:cNvPr id="79" name="Shape 79"/>
-        <p:cNvGrpSpPr/>
-        <p:nvPr/>
-      </p:nvGrpSpPr>
-      <p:grpSpPr>
-        <a:xfrm>
-          <a:off x="0" y="0"/>
-          <a:ext cx="0" cy="0"/>
-          <a:chOff x="0" y="0"/>
-          <a:chExt cx="0" cy="0"/>
-        </a:xfrm>
-      </p:grpSpPr>
-      <p:sp>
-        <p:nvSpPr>
-          <p:cNvPr id="80" name="Google Shape;80;g3ca1bd19589_0_28:notes"/>
-          <p:cNvSpPr txBox="1"/>
-          <p:nvPr>
-            <p:ph idx="1" type="body"/>
-          </p:nvPr>
-        </p:nvSpPr>
-        <p:spPr>
-          <a:xfrm>
-            <a:off x="685800" y="4343400"/>
-            <a:ext cx="5486400" cy="4114800"/>
-          </a:xfrm>
-          <a:prstGeom prst="rect">
-            <a:avLst/>
-          </a:prstGeom>
-          <a:noFill/>
-          <a:ln>
-            <a:noFill/>
-          </a:ln>
-        </p:spPr>
-        <p:txBody>
-          <a:bodyPr anchorCtr="0" anchor="t" bIns="91425" lIns="91425" spcFirstLastPara="1" rIns="91425" wrap="square" tIns="91425">
-            <a:noAutofit/>
-          </a:bodyPr>
-          <a:lstStyle/>
-          <a:p>
-            <a:pPr indent="0" lvl="0" marL="0" rtl="0" algn="l">
-              <a:lnSpc>
-                <a:spcPct val="100000"/>
-              </a:lnSpc>
-              <a:spcBef>
-                <a:spcPts val="0"/>
-              </a:spcBef>
-              <a:spcAft>
-                <a:spcPts val="0"/>
-              </a:spcAft>
-              <a:buSzPts val="1100"/>
-              <a:buNone/>
-            </a:pPr>
-            <a:r>
-              <a:t/>
-            </a:r>
-            <a:endParaRPr/>
-          </a:p>
-        </p:txBody>
-      </p:sp>
-      <p:sp>
-        <p:nvSpPr>
-          <p:cNvPr id="81" name="Google Shape;81;g3ca1bd19589_0_28:notes"/>
-          <p:cNvSpPr/>
-          <p:nvPr>
-            <p:ph idx="2" type="sldImg"/>
-          </p:nvPr>
-        </p:nvSpPr>
-        <p:spPr>
-          <a:xfrm>
-            <a:off x="1143225" y="685800"/>
-            <a:ext cx="4572300" cy="3429000"/>
-          </a:xfrm>
-          <a:custGeom>
-            <a:rect b="b" l="l" r="r" t="t"/>
-            <a:pathLst>
-              <a:path extrusionOk="0" h="120000" w="120000">
-                <a:moveTo>
-                  <a:pt x="0" y="0"/>
-                </a:moveTo>
-                <a:lnTo>
-                  <a:pt x="120000" y="0"/>
-                </a:lnTo>
-                <a:lnTo>
-                  <a:pt x="120000" y="120000"/>
-                </a:lnTo>
-                <a:lnTo>
-                  <a:pt x="0" y="120000"/>
-                </a:lnTo>
-                <a:close/>
-              </a:path>
-            </a:pathLst>
-          </a:custGeom>
-          <a:noFill/>
-          <a:ln cap="flat" cmpd="sng" w="9525">
-            <a:solidFill>
-              <a:srgbClr val="000000"/>
-            </a:solidFill>
-            <a:prstDash val="solid"/>
-            <a:round/>
-            <a:headEnd len="sm" w="sm" type="none"/>
-            <a:tailEnd len="sm" w="sm" type="none"/>
-          </a:ln>
-        </p:spPr>
-      </p:sp>
-    </p:spTree>
-  </p:cSld>
-  <p:clrMapOvr>
-    <a:masterClrMapping/>
-  </p:clrMapOvr>
-</p:notes>
-</file>
-
-<file path=ppt/notesSlides/notesSlide13.xml><?xml version="1.0" encoding="utf-8"?>
-<p:notes xmlns:a="http://schemas.openxmlformats.org/drawingml/2006/main" xmlns:r="http://schemas.openxmlformats.org/officeDocument/2006/relationships" xmlns:mc="http://schemas.openxmlformats.org/markup-compatibility/2006" xmlns:mv="urn:schemas-microsoft-com:mac:vml" xmlns:p="http://schemas.openxmlformats.org/presentationml/2006/main" xmlns:c="http://schemas.openxmlformats.org/drawingml/2006/chart" xmlns:dgm="http://schemas.openxmlformats.org/drawingml/2006/diagram" xmlns:o="urn:schemas-microsoft-com:office:office" xmlns:v="urn:schemas-microsoft-com:vml" xmlns:pvml="urn:schemas-microsoft-com:office:powerpoint" xmlns:com="http://schemas.openxmlformats.org/drawingml/2006/compatibility" xmlns:p14="http://schemas.microsoft.com/office/powerpoint/2010/main" xmlns:p15="http://schemas.microsoft.com/office/powerpoint/2012/main" xmlns:ahyp="http://schemas.microsoft.com/office/drawing/2018/hyperlinkcolor" showMasterPhAnim="0" showMasterSp="0">
-  <p:cSld>
-    <p:spTree>
-      <p:nvGrpSpPr>
-        <p:cNvPr id="84" name="Shape 84"/>
-        <p:cNvGrpSpPr/>
-        <p:nvPr/>
-      </p:nvGrpSpPr>
-      <p:grpSpPr>
-        <a:xfrm>
-          <a:off x="0" y="0"/>
-          <a:ext cx="0" cy="0"/>
-          <a:chOff x="0" y="0"/>
-          <a:chExt cx="0" cy="0"/>
-        </a:xfrm>
-      </p:grpSpPr>
-      <p:sp>
-        <p:nvSpPr>
-          <p:cNvPr id="85" name="Google Shape;85;g3ca1bd19589_0_32:notes"/>
-          <p:cNvSpPr txBox="1"/>
-          <p:nvPr>
-            <p:ph idx="1" type="body"/>
-          </p:nvPr>
-        </p:nvSpPr>
-        <p:spPr>
-          <a:xfrm>
-            <a:off x="685800" y="4343400"/>
-            <a:ext cx="5486400" cy="4114800"/>
-          </a:xfrm>
-          <a:prstGeom prst="rect">
-            <a:avLst/>
-          </a:prstGeom>
-          <a:noFill/>
-          <a:ln>
-            <a:noFill/>
-          </a:ln>
-        </p:spPr>
-        <p:txBody>
-          <a:bodyPr anchorCtr="0" anchor="t" bIns="91425" lIns="91425" spcFirstLastPara="1" rIns="91425" wrap="square" tIns="91425">
-            <a:noAutofit/>
-          </a:bodyPr>
-          <a:lstStyle/>
-          <a:p>
-            <a:pPr indent="0" lvl="0" marL="0" rtl="0" algn="l">
-              <a:lnSpc>
-                <a:spcPct val="100000"/>
-              </a:lnSpc>
-              <a:spcBef>
-                <a:spcPts val="0"/>
-              </a:spcBef>
-              <a:spcAft>
-                <a:spcPts val="0"/>
-              </a:spcAft>
-              <a:buSzPts val="1100"/>
-              <a:buNone/>
-            </a:pPr>
-            <a:r>
-              <a:t/>
-            </a:r>
-            <a:endParaRPr/>
-          </a:p>
-        </p:txBody>
-      </p:sp>
-      <p:sp>
-        <p:nvSpPr>
-          <p:cNvPr id="86" name="Google Shape;86;g3ca1bd19589_0_32:notes"/>
-          <p:cNvSpPr/>
-          <p:nvPr>
-            <p:ph idx="2" type="sldImg"/>
-          </p:nvPr>
-        </p:nvSpPr>
-        <p:spPr>
-          <a:xfrm>
-            <a:off x="1143225" y="685800"/>
-            <a:ext cx="4572300" cy="3429000"/>
-          </a:xfrm>
-          <a:custGeom>
-            <a:rect b="b" l="l" r="r" t="t"/>
-            <a:pathLst>
-              <a:path extrusionOk="0" h="120000" w="120000">
-                <a:moveTo>
-                  <a:pt x="0" y="0"/>
-                </a:moveTo>
-                <a:lnTo>
-                  <a:pt x="120000" y="0"/>
-                </a:lnTo>
-                <a:lnTo>
-                  <a:pt x="120000" y="120000"/>
-                </a:lnTo>
-                <a:lnTo>
-                  <a:pt x="0" y="120000"/>
-                </a:lnTo>
-                <a:close/>
-              </a:path>
-            </a:pathLst>
-          </a:custGeom>
-          <a:noFill/>
-          <a:ln cap="flat" cmpd="sng" w="9525">
-            <a:solidFill>
-              <a:srgbClr val="000000"/>
-            </a:solidFill>
-            <a:prstDash val="solid"/>
-            <a:round/>
-            <a:headEnd len="sm" w="sm" type="none"/>
-            <a:tailEnd len="sm" w="sm" type="none"/>
-          </a:ln>
-        </p:spPr>
-      </p:sp>
-    </p:spTree>
-  </p:cSld>
-  <p:clrMapOvr>
-    <a:masterClrMapping/>
-  </p:clrMapOvr>
-</p:notes>
-</file>
-
-<file path=ppt/notesSlides/notesSlide14.xml><?xml version="1.0" encoding="utf-8"?>
-<p:notes xmlns:a="http://schemas.openxmlformats.org/drawingml/2006/main" xmlns:r="http://schemas.openxmlformats.org/officeDocument/2006/relationships" xmlns:mc="http://schemas.openxmlformats.org/markup-compatibility/2006" xmlns:mv="urn:schemas-microsoft-com:mac:vml" xmlns:p="http://schemas.openxmlformats.org/presentationml/2006/main" xmlns:c="http://schemas.openxmlformats.org/drawingml/2006/chart" xmlns:dgm="http://schemas.openxmlformats.org/drawingml/2006/diagram" xmlns:o="urn:schemas-microsoft-com:office:office" xmlns:v="urn:schemas-microsoft-com:vml" xmlns:pvml="urn:schemas-microsoft-com:office:powerpoint" xmlns:com="http://schemas.openxmlformats.org/drawingml/2006/compatibility" xmlns:p14="http://schemas.microsoft.com/office/powerpoint/2010/main" xmlns:p15="http://schemas.microsoft.com/office/powerpoint/2012/main" xmlns:ahyp="http://schemas.microsoft.com/office/drawing/2018/hyperlinkcolor" showMasterPhAnim="0" showMasterSp="0">
-  <p:cSld>
-    <p:spTree>
-      <p:nvGrpSpPr>
-        <p:cNvPr id="89" name="Shape 89"/>
-        <p:cNvGrpSpPr/>
-        <p:nvPr/>
-      </p:nvGrpSpPr>
-      <p:grpSpPr>
-        <a:xfrm>
-          <a:off x="0" y="0"/>
-          <a:ext cx="0" cy="0"/>
-          <a:chOff x="0" y="0"/>
-          <a:chExt cx="0" cy="0"/>
-        </a:xfrm>
-      </p:grpSpPr>
-      <p:sp>
-        <p:nvSpPr>
-          <p:cNvPr id="90" name="Google Shape;90;g3ca1bd19589_0_61:notes"/>
-          <p:cNvSpPr txBox="1"/>
-          <p:nvPr>
-            <p:ph idx="1" type="body"/>
-          </p:nvPr>
-        </p:nvSpPr>
-        <p:spPr>
-          <a:xfrm>
-            <a:off x="685800" y="4343400"/>
-            <a:ext cx="5486400" cy="4114800"/>
-          </a:xfrm>
-          <a:prstGeom prst="rect">
-            <a:avLst/>
-          </a:prstGeom>
-          <a:noFill/>
-          <a:ln>
-            <a:noFill/>
-          </a:ln>
-        </p:spPr>
-        <p:txBody>
-          <a:bodyPr anchorCtr="0" anchor="t" bIns="91425" lIns="91425" spcFirstLastPara="1" rIns="91425" wrap="square" tIns="91425">
-            <a:noAutofit/>
-          </a:bodyPr>
-          <a:lstStyle/>
-          <a:p>
-            <a:pPr indent="0" lvl="0" marL="0" rtl="0" algn="l">
-              <a:lnSpc>
-                <a:spcPct val="100000"/>
-              </a:lnSpc>
-              <a:spcBef>
-                <a:spcPts val="0"/>
-              </a:spcBef>
-              <a:spcAft>
-                <a:spcPts val="0"/>
-              </a:spcAft>
-              <a:buSzPts val="1100"/>
-              <a:buNone/>
-            </a:pPr>
-            <a:r>
-              <a:t/>
-            </a:r>
-            <a:endParaRPr/>
-          </a:p>
-        </p:txBody>
-      </p:sp>
-      <p:sp>
-        <p:nvSpPr>
-          <p:cNvPr id="91" name="Google Shape;91;g3ca1bd19589_0_61:notes"/>
-          <p:cNvSpPr/>
-          <p:nvPr>
-            <p:ph idx="2" type="sldImg"/>
-          </p:nvPr>
-        </p:nvSpPr>
-        <p:spPr>
-          <a:xfrm>
-            <a:off x="1143225" y="685800"/>
-            <a:ext cx="4572300" cy="3429000"/>
-          </a:xfrm>
-          <a:custGeom>
-            <a:rect b="b" l="l" r="r" t="t"/>
-            <a:pathLst>
-              <a:path extrusionOk="0" h="120000" w="120000">
-                <a:moveTo>
-                  <a:pt x="0" y="0"/>
-                </a:moveTo>
-                <a:lnTo>
-                  <a:pt x="120000" y="0"/>
-                </a:lnTo>
-                <a:lnTo>
-                  <a:pt x="120000" y="120000"/>
-                </a:lnTo>
-                <a:lnTo>
-                  <a:pt x="0" y="120000"/>
-                </a:lnTo>
-                <a:close/>
-              </a:path>
-            </a:pathLst>
-          </a:custGeom>
-          <a:noFill/>
-          <a:ln cap="flat" cmpd="sng" w="9525">
-            <a:solidFill>
-              <a:srgbClr val="000000"/>
-            </a:solidFill>
-            <a:prstDash val="solid"/>
-            <a:round/>
-            <a:headEnd len="sm" w="sm" type="none"/>
-            <a:tailEnd len="sm" w="sm" type="none"/>
-          </a:ln>
-        </p:spPr>
-      </p:sp>
-    </p:spTree>
-  </p:cSld>
-  <p:clrMapOvr>
-    <a:masterClrMapping/>
-  </p:clrMapOvr>
-</p:notes>
-</file>
-
-<file path=ppt/notesSlides/notesSlide15.xml><?xml version="1.0" encoding="utf-8"?>
-<p:notes xmlns:a="http://schemas.openxmlformats.org/drawingml/2006/main" xmlns:r="http://schemas.openxmlformats.org/officeDocument/2006/relationships" xmlns:mc="http://schemas.openxmlformats.org/markup-compatibility/2006" xmlns:mv="urn:schemas-microsoft-com:mac:vml" xmlns:p="http://schemas.openxmlformats.org/presentationml/2006/main" xmlns:c="http://schemas.openxmlformats.org/drawingml/2006/chart" xmlns:dgm="http://schemas.openxmlformats.org/drawingml/2006/diagram" xmlns:o="urn:schemas-microsoft-com:office:office" xmlns:v="urn:schemas-microsoft-com:vml" xmlns:pvml="urn:schemas-microsoft-com:office:powerpoint" xmlns:com="http://schemas.openxmlformats.org/drawingml/2006/compatibility" xmlns:p14="http://schemas.microsoft.com/office/powerpoint/2010/main" xmlns:p15="http://schemas.microsoft.com/office/powerpoint/2012/main" xmlns:ahyp="http://schemas.microsoft.com/office/drawing/2018/hyperlinkcolor" showMasterPhAnim="0" showMasterSp="0">
-  <p:cSld>
-    <p:spTree>
-      <p:nvGrpSpPr>
-        <p:cNvPr id="94" name="Shape 94"/>
-        <p:cNvGrpSpPr/>
-        <p:nvPr/>
-      </p:nvGrpSpPr>
-      <p:grpSpPr>
-        <a:xfrm>
-          <a:off x="0" y="0"/>
-          <a:ext cx="0" cy="0"/>
-          <a:chOff x="0" y="0"/>
-          <a:chExt cx="0" cy="0"/>
-        </a:xfrm>
-      </p:grpSpPr>
-      <p:sp>
-        <p:nvSpPr>
-          <p:cNvPr id="95" name="Google Shape;95;g3ca1bd19589_0_65:notes"/>
-          <p:cNvSpPr txBox="1"/>
-          <p:nvPr>
-            <p:ph idx="1" type="body"/>
-          </p:nvPr>
-        </p:nvSpPr>
-        <p:spPr>
-          <a:xfrm>
-            <a:off x="685800" y="4343400"/>
-            <a:ext cx="5486400" cy="4114800"/>
-          </a:xfrm>
-          <a:prstGeom prst="rect">
-            <a:avLst/>
-          </a:prstGeom>
-          <a:noFill/>
-          <a:ln>
-            <a:noFill/>
-          </a:ln>
-        </p:spPr>
-        <p:txBody>
-          <a:bodyPr anchorCtr="0" anchor="t" bIns="91425" lIns="91425" spcFirstLastPara="1" rIns="91425" wrap="square" tIns="91425">
-            <a:noAutofit/>
-          </a:bodyPr>
-          <a:lstStyle/>
-          <a:p>
-            <a:pPr indent="0" lvl="0" marL="0" rtl="0" algn="l">
-              <a:lnSpc>
-                <a:spcPct val="100000"/>
-              </a:lnSpc>
-              <a:spcBef>
-                <a:spcPts val="0"/>
-              </a:spcBef>
-              <a:spcAft>
-                <a:spcPts val="0"/>
-              </a:spcAft>
-              <a:buSzPts val="1100"/>
-              <a:buNone/>
-            </a:pPr>
-            <a:r>
-              <a:t/>
-            </a:r>
-            <a:endParaRPr/>
-          </a:p>
-        </p:txBody>
-      </p:sp>
-      <p:sp>
-        <p:nvSpPr>
-          <p:cNvPr id="96" name="Google Shape;96;g3ca1bd19589_0_65:notes"/>
-          <p:cNvSpPr/>
-          <p:nvPr>
-            <p:ph idx="2" type="sldImg"/>
-          </p:nvPr>
-        </p:nvSpPr>
-        <p:spPr>
-          <a:xfrm>
-            <a:off x="1143225" y="685800"/>
-            <a:ext cx="4572300" cy="3429000"/>
-          </a:xfrm>
-          <a:custGeom>
-            <a:rect b="b" l="l" r="r" t="t"/>
-            <a:pathLst>
-              <a:path extrusionOk="0" h="120000" w="120000">
-                <a:moveTo>
-                  <a:pt x="0" y="0"/>
-                </a:moveTo>
-                <a:lnTo>
-                  <a:pt x="120000" y="0"/>
-                </a:lnTo>
-                <a:lnTo>
-                  <a:pt x="120000" y="120000"/>
-                </a:lnTo>
-                <a:lnTo>
-                  <a:pt x="0" y="120000"/>
-                </a:lnTo>
-                <a:close/>
-              </a:path>
-            </a:pathLst>
-          </a:custGeom>
-          <a:noFill/>
-          <a:ln cap="flat" cmpd="sng" w="9525">
-            <a:solidFill>
-              <a:srgbClr val="000000"/>
-            </a:solidFill>
-            <a:prstDash val="solid"/>
-            <a:round/>
-            <a:headEnd len="sm" w="sm" type="none"/>
-            <a:tailEnd len="sm" w="sm" type="none"/>
-          </a:ln>
-        </p:spPr>
-      </p:sp>
-    </p:spTree>
-  </p:cSld>
-  <p:clrMapOvr>
-    <a:masterClrMapping/>
-  </p:clrMapOvr>
-</p:notes>
-</file>
-
 <file path=ppt/notesSlides/notesSlide2.xml><?xml version="1.0" encoding="utf-8"?>
 <p:notes xmlns:a="http://schemas.openxmlformats.org/drawingml/2006/main" xmlns:r="http://schemas.openxmlformats.org/officeDocument/2006/relationships" xmlns:mc="http://schemas.openxmlformats.org/markup-compatibility/2006" xmlns:mv="urn:schemas-microsoft-com:mac:vml" xmlns:p="http://schemas.openxmlformats.org/presentationml/2006/main" xmlns:c="http://schemas.openxmlformats.org/drawingml/2006/chart" xmlns:dgm="http://schemas.openxmlformats.org/drawingml/2006/diagram" xmlns:o="urn:schemas-microsoft-com:office:office" xmlns:v="urn:schemas-microsoft-com:vml" xmlns:pvml="urn:schemas-microsoft-com:office:powerpoint" xmlns:com="http://schemas.openxmlformats.org/drawingml/2006/compatibility" xmlns:p14="http://schemas.microsoft.com/office/powerpoint/2010/main" xmlns:p15="http://schemas.microsoft.com/office/powerpoint/2012/main" xmlns:ahyp="http://schemas.microsoft.com/office/drawing/2018/hyperlinkcolor" showMasterPhAnim="0" showMasterSp="0">
   <p:cSld>
@@ -2027,7 +1318,7 @@
       </p:grpSpPr>
       <p:sp>
         <p:nvSpPr>
-          <p:cNvPr id="45" name="Google Shape;45;p5:notes"/>
+          <p:cNvPr id="45" name="Google Shape;45;g3caa58df123_0_0:notes"/>
           <p:cNvSpPr txBox="1"/>
           <p:nvPr>
             <p:ph idx="1" type="body"/>
@@ -2074,7 +1365,7 @@
       </p:sp>
       <p:sp>
         <p:nvSpPr>
-          <p:cNvPr id="46" name="Google Shape;46;p5:notes"/>
+          <p:cNvPr id="46" name="Google Shape;46;g3caa58df123_0_0:notes"/>
           <p:cNvSpPr/>
           <p:nvPr>
             <p:ph idx="2" type="sldImg"/>
@@ -2083,7 +1374,7 @@
         <p:spPr>
           <a:xfrm>
             <a:off x="1143225" y="685800"/>
-            <a:ext cx="4572225" cy="3429000"/>
+            <a:ext cx="4572300" cy="3429000"/>
           </a:xfrm>
           <a:custGeom>
             <a:rect b="b" l="l" r="r" t="t"/>
@@ -2144,7 +1435,7 @@
       </p:grpSpPr>
       <p:sp>
         <p:nvSpPr>
-          <p:cNvPr id="50" name="Google Shape;50;g3ca1bd19589_0_45:notes"/>
+          <p:cNvPr id="50" name="Google Shape;50;p5:notes"/>
           <p:cNvSpPr txBox="1"/>
           <p:nvPr>
             <p:ph idx="1" type="body"/>
@@ -2191,7 +1482,7 @@
       </p:sp>
       <p:sp>
         <p:nvSpPr>
-          <p:cNvPr id="51" name="Google Shape;51;g3ca1bd19589_0_45:notes"/>
+          <p:cNvPr id="51" name="Google Shape;51;p5:notes"/>
           <p:cNvSpPr/>
           <p:nvPr>
             <p:ph idx="2" type="sldImg"/>
@@ -2200,7 +1491,7 @@
         <p:spPr>
           <a:xfrm>
             <a:off x="1143225" y="685800"/>
-            <a:ext cx="4572300" cy="3429000"/>
+            <a:ext cx="4572225" cy="3429000"/>
           </a:xfrm>
           <a:custGeom>
             <a:rect b="b" l="l" r="r" t="t"/>
@@ -2261,7 +1552,7 @@
       </p:grpSpPr>
       <p:sp>
         <p:nvSpPr>
-          <p:cNvPr id="55" name="Google Shape;55;g3ca1bd19589_0_4:notes"/>
+          <p:cNvPr id="55" name="Google Shape;55;g3ca1bd19589_0_45:notes"/>
           <p:cNvSpPr txBox="1"/>
           <p:nvPr>
             <p:ph idx="1" type="body"/>
@@ -2308,7 +1599,7 @@
       </p:sp>
       <p:sp>
         <p:nvSpPr>
-          <p:cNvPr id="56" name="Google Shape;56;g3ca1bd19589_0_4:notes"/>
+          <p:cNvPr id="56" name="Google Shape;56;g3ca1bd19589_0_45:notes"/>
           <p:cNvSpPr/>
           <p:nvPr>
             <p:ph idx="2" type="sldImg"/>
@@ -2378,7 +1669,7 @@
       </p:grpSpPr>
       <p:sp>
         <p:nvSpPr>
-          <p:cNvPr id="60" name="Google Shape;60;g3ca1bd19589_0_8:notes"/>
+          <p:cNvPr id="60" name="Google Shape;60;g3caa58df123_0_4:notes"/>
           <p:cNvSpPr txBox="1"/>
           <p:nvPr>
             <p:ph idx="1" type="body"/>
@@ -2425,124 +1716,7 @@
       </p:sp>
       <p:sp>
         <p:nvSpPr>
-          <p:cNvPr id="61" name="Google Shape;61;g3ca1bd19589_0_8:notes"/>
-          <p:cNvSpPr/>
-          <p:nvPr>
-            <p:ph idx="2" type="sldImg"/>
-          </p:nvPr>
-        </p:nvSpPr>
-        <p:spPr>
-          <a:xfrm>
-            <a:off x="1143225" y="685800"/>
-            <a:ext cx="4572300" cy="3429000"/>
-          </a:xfrm>
-          <a:custGeom>
-            <a:rect b="b" l="l" r="r" t="t"/>
-            <a:pathLst>
-              <a:path extrusionOk="0" h="120000" w="120000">
-                <a:moveTo>
-                  <a:pt x="0" y="0"/>
-                </a:moveTo>
-                <a:lnTo>
-                  <a:pt x="120000" y="0"/>
-                </a:lnTo>
-                <a:lnTo>
-                  <a:pt x="120000" y="120000"/>
-                </a:lnTo>
-                <a:lnTo>
-                  <a:pt x="0" y="120000"/>
-                </a:lnTo>
-                <a:close/>
-              </a:path>
-            </a:pathLst>
-          </a:custGeom>
-          <a:noFill/>
-          <a:ln cap="flat" cmpd="sng" w="9525">
-            <a:solidFill>
-              <a:srgbClr val="000000"/>
-            </a:solidFill>
-            <a:prstDash val="solid"/>
-            <a:round/>
-            <a:headEnd len="sm" w="sm" type="none"/>
-            <a:tailEnd len="sm" w="sm" type="none"/>
-          </a:ln>
-        </p:spPr>
-      </p:sp>
-    </p:spTree>
-  </p:cSld>
-  <p:clrMapOvr>
-    <a:masterClrMapping/>
-  </p:clrMapOvr>
-</p:notes>
-</file>
-
-<file path=ppt/notesSlides/notesSlide9.xml><?xml version="1.0" encoding="utf-8"?>
-<p:notes xmlns:a="http://schemas.openxmlformats.org/drawingml/2006/main" xmlns:r="http://schemas.openxmlformats.org/officeDocument/2006/relationships" xmlns:mc="http://schemas.openxmlformats.org/markup-compatibility/2006" xmlns:mv="urn:schemas-microsoft-com:mac:vml" xmlns:p="http://schemas.openxmlformats.org/presentationml/2006/main" xmlns:c="http://schemas.openxmlformats.org/drawingml/2006/chart" xmlns:dgm="http://schemas.openxmlformats.org/drawingml/2006/diagram" xmlns:o="urn:schemas-microsoft-com:office:office" xmlns:v="urn:schemas-microsoft-com:vml" xmlns:pvml="urn:schemas-microsoft-com:office:powerpoint" xmlns:com="http://schemas.openxmlformats.org/drawingml/2006/compatibility" xmlns:p14="http://schemas.microsoft.com/office/powerpoint/2010/main" xmlns:p15="http://schemas.microsoft.com/office/powerpoint/2012/main" xmlns:ahyp="http://schemas.microsoft.com/office/drawing/2018/hyperlinkcolor" showMasterPhAnim="0" showMasterSp="0">
-  <p:cSld>
-    <p:spTree>
-      <p:nvGrpSpPr>
-        <p:cNvPr id="64" name="Shape 64"/>
-        <p:cNvGrpSpPr/>
-        <p:nvPr/>
-      </p:nvGrpSpPr>
-      <p:grpSpPr>
-        <a:xfrm>
-          <a:off x="0" y="0"/>
-          <a:ext cx="0" cy="0"/>
-          <a:chOff x="0" y="0"/>
-          <a:chExt cx="0" cy="0"/>
-        </a:xfrm>
-      </p:grpSpPr>
-      <p:sp>
-        <p:nvSpPr>
-          <p:cNvPr id="65" name="Google Shape;65;g3ca1bd19589_0_12:notes"/>
-          <p:cNvSpPr txBox="1"/>
-          <p:nvPr>
-            <p:ph idx="1" type="body"/>
-          </p:nvPr>
-        </p:nvSpPr>
-        <p:spPr>
-          <a:xfrm>
-            <a:off x="685800" y="4343400"/>
-            <a:ext cx="5486400" cy="4114800"/>
-          </a:xfrm>
-          <a:prstGeom prst="rect">
-            <a:avLst/>
-          </a:prstGeom>
-          <a:noFill/>
-          <a:ln>
-            <a:noFill/>
-          </a:ln>
-        </p:spPr>
-        <p:txBody>
-          <a:bodyPr anchorCtr="0" anchor="t" bIns="91425" lIns="91425" spcFirstLastPara="1" rIns="91425" wrap="square" tIns="91425">
-            <a:noAutofit/>
-          </a:bodyPr>
-          <a:lstStyle/>
-          <a:p>
-            <a:pPr indent="0" lvl="0" marL="0" rtl="0" algn="l">
-              <a:lnSpc>
-                <a:spcPct val="100000"/>
-              </a:lnSpc>
-              <a:spcBef>
-                <a:spcPts val="0"/>
-              </a:spcBef>
-              <a:spcAft>
-                <a:spcPts val="0"/>
-              </a:spcAft>
-              <a:buSzPts val="1100"/>
-              <a:buNone/>
-            </a:pPr>
-            <a:r>
-              <a:t/>
-            </a:r>
-            <a:endParaRPr/>
-          </a:p>
-        </p:txBody>
-      </p:sp>
-      <p:sp>
-        <p:nvSpPr>
-          <p:cNvPr id="66" name="Google Shape;66;g3ca1bd19589_0_12:notes"/>
+          <p:cNvPr id="61" name="Google Shape;61;g3caa58df123_0_4:notes"/>
           <p:cNvSpPr/>
           <p:nvPr>
             <p:ph idx="2" type="sldImg"/>
@@ -6465,7 +5639,7 @@
                   <a:schemeClr val="lt1"/>
                 </a:solidFill>
               </a:rPr>
-              <a:t>Christ in Me Arise</a:t>
+              <a:t>The Lord Is My Shepherd</a:t>
             </a:r>
             <a:endParaRPr/>
           </a:p>
@@ -6533,7 +5707,7 @@
                   <a:schemeClr val="lt1"/>
                 </a:solidFill>
               </a:rPr>
-              <a:t>and Music by Trevor Thomson</a:t>
+              <a:t>and Music by Joshua Blakesley; Psalm 23:1-3, 3-4</a:t>
             </a:r>
             <a:endParaRPr/>
           </a:p>
@@ -6677,7 +5851,7 @@
                   <a:schemeClr val="lt1"/>
                 </a:solidFill>
               </a:rPr>
-              <a:t>© 2008 SPIRIT AND SONG OCP</a:t>
+              <a:t>© 1998, 2003, Joshua Blakesley</a:t>
             </a:r>
             <a:endParaRPr sz="1800">
               <a:solidFill>
@@ -6812,1070 +5986,6 @@
               <a:ea typeface="Arial"/>
               <a:cs typeface="Arial"/>
               <a:sym typeface="Arial"/>
-            </a:endParaRPr>
-          </a:p>
-        </p:txBody>
-      </p:sp>
-    </p:spTree>
-  </p:cSld>
-  <p:clrMapOvr>
-    <a:masterClrMapping/>
-  </p:clrMapOvr>
-</p:sld>
-</file>
-
-<file path=ppt/slides/slide10.xml><?xml version="1.0" encoding="utf-8"?>
-<p:sld xmlns:a="http://schemas.openxmlformats.org/drawingml/2006/main" xmlns:r="http://schemas.openxmlformats.org/officeDocument/2006/relationships" xmlns:mc="http://schemas.openxmlformats.org/markup-compatibility/2006" xmlns:mv="urn:schemas-microsoft-com:mac:vml" xmlns:p="http://schemas.openxmlformats.org/presentationml/2006/main" xmlns:c="http://schemas.openxmlformats.org/drawingml/2006/chart" xmlns:dgm="http://schemas.openxmlformats.org/drawingml/2006/diagram" xmlns:o="urn:schemas-microsoft-com:office:office" xmlns:v="urn:schemas-microsoft-com:vml" xmlns:pvml="urn:schemas-microsoft-com:office:powerpoint" xmlns:com="http://schemas.openxmlformats.org/drawingml/2006/compatibility" xmlns:p14="http://schemas.microsoft.com/office/powerpoint/2010/main" xmlns:p15="http://schemas.microsoft.com/office/powerpoint/2012/main" xmlns:ahyp="http://schemas.microsoft.com/office/drawing/2018/hyperlinkcolor">
-  <p:cSld>
-    <p:bg>
-      <p:bgPr>
-        <a:solidFill>
-          <a:schemeClr val="dk1"/>
-        </a:solidFill>
-      </p:bgPr>
-    </p:bg>
-    <p:spTree>
-      <p:nvGrpSpPr>
-        <p:cNvPr id="72" name="Shape 72"/>
-        <p:cNvGrpSpPr/>
-        <p:nvPr/>
-      </p:nvGrpSpPr>
-      <p:grpSpPr>
-        <a:xfrm>
-          <a:off x="0" y="0"/>
-          <a:ext cx="0" cy="0"/>
-          <a:chOff x="0" y="0"/>
-          <a:chExt cx="0" cy="0"/>
-        </a:xfrm>
-      </p:grpSpPr>
-      <p:sp>
-        <p:nvSpPr>
-          <p:cNvPr id="73" name="Google Shape;73;g3ca1bd19589_0_53"/>
-          <p:cNvSpPr txBox="1"/>
-          <p:nvPr>
-            <p:ph type="title"/>
-          </p:nvPr>
-        </p:nvSpPr>
-        <p:spPr>
-          <a:xfrm>
-            <a:off x="152400" y="152400"/>
-            <a:ext cx="8839200" cy="6553200"/>
-          </a:xfrm>
-          <a:prstGeom prst="rect">
-            <a:avLst/>
-          </a:prstGeom>
-          <a:noFill/>
-          <a:ln>
-            <a:noFill/>
-          </a:ln>
-        </p:spPr>
-        <p:txBody>
-          <a:bodyPr anchorCtr="0" anchor="ctr" bIns="45700" lIns="91425" spcFirstLastPara="1" rIns="91425" wrap="square" tIns="45700">
-            <a:noAutofit/>
-          </a:bodyPr>
-          <a:lstStyle/>
-          <a:p>
-            <a:pPr indent="0" lvl="0" marL="0" rtl="0" algn="ctr">
-              <a:lnSpc>
-                <a:spcPct val="125000"/>
-              </a:lnSpc>
-              <a:spcBef>
-                <a:spcPts val="0"/>
-              </a:spcBef>
-              <a:spcAft>
-                <a:spcPts val="0"/>
-              </a:spcAft>
-              <a:buClr>
-                <a:schemeClr val="lt1"/>
-              </a:buClr>
-              <a:buSzPts val="4400"/>
-              <a:buFont typeface="Arial"/>
-              <a:buNone/>
-            </a:pPr>
-            <a:r>
-              <a:rPr lang="en-US">
-                <a:solidFill>
-                  <a:schemeClr val="lt1"/>
-                </a:solidFill>
-              </a:rPr>
-              <a:t>Christ in me arise </a:t>
-            </a:r>
-            <a:endParaRPr>
-              <a:solidFill>
-                <a:schemeClr val="lt1"/>
-              </a:solidFill>
-            </a:endParaRPr>
-          </a:p>
-          <a:p>
-            <a:pPr indent="0" lvl="0" marL="0" rtl="0" algn="ctr">
-              <a:lnSpc>
-                <a:spcPct val="125000"/>
-              </a:lnSpc>
-              <a:spcBef>
-                <a:spcPts val="0"/>
-              </a:spcBef>
-              <a:spcAft>
-                <a:spcPts val="0"/>
-              </a:spcAft>
-              <a:buClr>
-                <a:schemeClr val="lt1"/>
-              </a:buClr>
-              <a:buSzPts val="4400"/>
-              <a:buFont typeface="Arial"/>
-              <a:buNone/>
-            </a:pPr>
-            <a:r>
-              <a:rPr lang="en-US">
-                <a:solidFill>
-                  <a:schemeClr val="lt1"/>
-                </a:solidFill>
-              </a:rPr>
-              <a:t>and dispel all the darkness</a:t>
-            </a:r>
-            <a:endParaRPr>
-              <a:solidFill>
-                <a:schemeClr val="lt1"/>
-              </a:solidFill>
-            </a:endParaRPr>
-          </a:p>
-          <a:p>
-            <a:pPr indent="0" lvl="0" marL="0" rtl="0" algn="ctr">
-              <a:lnSpc>
-                <a:spcPct val="125000"/>
-              </a:lnSpc>
-              <a:spcBef>
-                <a:spcPts val="0"/>
-              </a:spcBef>
-              <a:spcAft>
-                <a:spcPts val="0"/>
-              </a:spcAft>
-              <a:buClr>
-                <a:schemeClr val="lt1"/>
-              </a:buClr>
-              <a:buSzPts val="4400"/>
-              <a:buFont typeface="Arial"/>
-              <a:buNone/>
-            </a:pPr>
-            <a:r>
-              <a:rPr lang="en-US">
-                <a:solidFill>
-                  <a:schemeClr val="lt1"/>
-                </a:solidFill>
-              </a:rPr>
-              <a:t>Christ in me arise with Your </a:t>
-            </a:r>
-            <a:endParaRPr>
-              <a:solidFill>
-                <a:schemeClr val="lt1"/>
-              </a:solidFill>
-            </a:endParaRPr>
-          </a:p>
-          <a:p>
-            <a:pPr indent="0" lvl="0" marL="0" rtl="0" algn="ctr">
-              <a:lnSpc>
-                <a:spcPct val="125000"/>
-              </a:lnSpc>
-              <a:spcBef>
-                <a:spcPts val="0"/>
-              </a:spcBef>
-              <a:spcAft>
-                <a:spcPts val="0"/>
-              </a:spcAft>
-              <a:buClr>
-                <a:schemeClr val="lt1"/>
-              </a:buClr>
-              <a:buSzPts val="4400"/>
-              <a:buFont typeface="Arial"/>
-              <a:buNone/>
-            </a:pPr>
-            <a:r>
-              <a:rPr lang="en-US">
-                <a:solidFill>
-                  <a:schemeClr val="lt1"/>
-                </a:solidFill>
-              </a:rPr>
-              <a:t>power and Your strength</a:t>
-            </a:r>
-            <a:endParaRPr>
-              <a:solidFill>
-                <a:schemeClr val="lt1"/>
-              </a:solidFill>
-            </a:endParaRPr>
-          </a:p>
-        </p:txBody>
-      </p:sp>
-    </p:spTree>
-  </p:cSld>
-  <p:clrMapOvr>
-    <a:masterClrMapping/>
-  </p:clrMapOvr>
-</p:sld>
-</file>
-
-<file path=ppt/slides/slide11.xml><?xml version="1.0" encoding="utf-8"?>
-<p:sld xmlns:a="http://schemas.openxmlformats.org/drawingml/2006/main" xmlns:r="http://schemas.openxmlformats.org/officeDocument/2006/relationships" xmlns:mc="http://schemas.openxmlformats.org/markup-compatibility/2006" xmlns:mv="urn:schemas-microsoft-com:mac:vml" xmlns:p="http://schemas.openxmlformats.org/presentationml/2006/main" xmlns:c="http://schemas.openxmlformats.org/drawingml/2006/chart" xmlns:dgm="http://schemas.openxmlformats.org/drawingml/2006/diagram" xmlns:o="urn:schemas-microsoft-com:office:office" xmlns:v="urn:schemas-microsoft-com:vml" xmlns:pvml="urn:schemas-microsoft-com:office:powerpoint" xmlns:com="http://schemas.openxmlformats.org/drawingml/2006/compatibility" xmlns:p14="http://schemas.microsoft.com/office/powerpoint/2010/main" xmlns:p15="http://schemas.microsoft.com/office/powerpoint/2012/main" xmlns:ahyp="http://schemas.microsoft.com/office/drawing/2018/hyperlinkcolor">
-  <p:cSld>
-    <p:bg>
-      <p:bgPr>
-        <a:solidFill>
-          <a:schemeClr val="dk1"/>
-        </a:solidFill>
-      </p:bgPr>
-    </p:bg>
-    <p:spTree>
-      <p:nvGrpSpPr>
-        <p:cNvPr id="77" name="Shape 77"/>
-        <p:cNvGrpSpPr/>
-        <p:nvPr/>
-      </p:nvGrpSpPr>
-      <p:grpSpPr>
-        <a:xfrm>
-          <a:off x="0" y="0"/>
-          <a:ext cx="0" cy="0"/>
-          <a:chOff x="0" y="0"/>
-          <a:chExt cx="0" cy="0"/>
-        </a:xfrm>
-      </p:grpSpPr>
-      <p:sp>
-        <p:nvSpPr>
-          <p:cNvPr id="78" name="Google Shape;78;g3ca1bd19589_0_57"/>
-          <p:cNvSpPr txBox="1"/>
-          <p:nvPr>
-            <p:ph type="title"/>
-          </p:nvPr>
-        </p:nvSpPr>
-        <p:spPr>
-          <a:xfrm>
-            <a:off x="152400" y="274637"/>
-            <a:ext cx="8839200" cy="6278700"/>
-          </a:xfrm>
-          <a:prstGeom prst="rect">
-            <a:avLst/>
-          </a:prstGeom>
-          <a:noFill/>
-          <a:ln>
-            <a:noFill/>
-          </a:ln>
-        </p:spPr>
-        <p:txBody>
-          <a:bodyPr anchorCtr="0" anchor="ctr" bIns="45700" lIns="91425" spcFirstLastPara="1" rIns="91425" wrap="square" tIns="45700">
-            <a:noAutofit/>
-          </a:bodyPr>
-          <a:lstStyle/>
-          <a:p>
-            <a:pPr indent="0" lvl="0" marL="0" rtl="0" algn="ctr">
-              <a:lnSpc>
-                <a:spcPct val="125000"/>
-              </a:lnSpc>
-              <a:spcBef>
-                <a:spcPts val="0"/>
-              </a:spcBef>
-              <a:spcAft>
-                <a:spcPts val="0"/>
-              </a:spcAft>
-              <a:buClr>
-                <a:schemeClr val="lt1"/>
-              </a:buClr>
-              <a:buSzPts val="4200"/>
-              <a:buFont typeface="Arial"/>
-              <a:buNone/>
-            </a:pPr>
-            <a:r>
-              <a:rPr lang="en-US" sz="4200">
-                <a:solidFill>
-                  <a:schemeClr val="lt1"/>
-                </a:solidFill>
-              </a:rPr>
-              <a:t>Christ in me pour out </a:t>
-            </a:r>
-            <a:endParaRPr sz="4200">
-              <a:solidFill>
-                <a:schemeClr val="lt1"/>
-              </a:solidFill>
-            </a:endParaRPr>
-          </a:p>
-          <a:p>
-            <a:pPr indent="0" lvl="0" marL="0" rtl="0" algn="ctr">
-              <a:lnSpc>
-                <a:spcPct val="125000"/>
-              </a:lnSpc>
-              <a:spcBef>
-                <a:spcPts val="0"/>
-              </a:spcBef>
-              <a:spcAft>
-                <a:spcPts val="0"/>
-              </a:spcAft>
-              <a:buClr>
-                <a:schemeClr val="lt1"/>
-              </a:buClr>
-              <a:buSzPts val="4200"/>
-              <a:buFont typeface="Arial"/>
-              <a:buNone/>
-            </a:pPr>
-            <a:r>
-              <a:rPr lang="en-US" sz="4200">
-                <a:solidFill>
-                  <a:schemeClr val="lt1"/>
-                </a:solidFill>
-              </a:rPr>
-              <a:t>Your blessing and healing</a:t>
-            </a:r>
-            <a:endParaRPr sz="4200">
-              <a:solidFill>
-                <a:schemeClr val="lt1"/>
-              </a:solidFill>
-            </a:endParaRPr>
-          </a:p>
-          <a:p>
-            <a:pPr indent="0" lvl="0" marL="0" rtl="0" algn="ctr">
-              <a:lnSpc>
-                <a:spcPct val="125000"/>
-              </a:lnSpc>
-              <a:spcBef>
-                <a:spcPts val="0"/>
-              </a:spcBef>
-              <a:spcAft>
-                <a:spcPts val="0"/>
-              </a:spcAft>
-              <a:buClr>
-                <a:schemeClr val="lt1"/>
-              </a:buClr>
-              <a:buSzPts val="4200"/>
-              <a:buFont typeface="Arial"/>
-              <a:buNone/>
-            </a:pPr>
-            <a:r>
-              <a:rPr lang="en-US" sz="4200">
-                <a:solidFill>
-                  <a:schemeClr val="lt1"/>
-                </a:solidFill>
-              </a:rPr>
-              <a:t>Christ in me arise </a:t>
-            </a:r>
-            <a:endParaRPr sz="4200">
-              <a:solidFill>
-                <a:schemeClr val="lt1"/>
-              </a:solidFill>
-            </a:endParaRPr>
-          </a:p>
-          <a:p>
-            <a:pPr indent="0" lvl="0" marL="0" rtl="0" algn="ctr">
-              <a:lnSpc>
-                <a:spcPct val="125000"/>
-              </a:lnSpc>
-              <a:spcBef>
-                <a:spcPts val="0"/>
-              </a:spcBef>
-              <a:spcAft>
-                <a:spcPts val="0"/>
-              </a:spcAft>
-              <a:buClr>
-                <a:schemeClr val="lt1"/>
-              </a:buClr>
-              <a:buSzPts val="4200"/>
-              <a:buFont typeface="Arial"/>
-              <a:buNone/>
-            </a:pPr>
-            <a:r>
-              <a:rPr lang="en-US" sz="4200">
-                <a:solidFill>
-                  <a:schemeClr val="lt1"/>
-                </a:solidFill>
-              </a:rPr>
-              <a:t>and I shall rise with You</a:t>
-            </a:r>
-            <a:endParaRPr sz="4200">
-              <a:solidFill>
-                <a:schemeClr val="lt1"/>
-              </a:solidFill>
-            </a:endParaRPr>
-          </a:p>
-        </p:txBody>
-      </p:sp>
-    </p:spTree>
-  </p:cSld>
-  <p:clrMapOvr>
-    <a:masterClrMapping/>
-  </p:clrMapOvr>
-</p:sld>
-</file>
-
-<file path=ppt/slides/slide12.xml><?xml version="1.0" encoding="utf-8"?>
-<p:sld xmlns:a="http://schemas.openxmlformats.org/drawingml/2006/main" xmlns:r="http://schemas.openxmlformats.org/officeDocument/2006/relationships" xmlns:mc="http://schemas.openxmlformats.org/markup-compatibility/2006" xmlns:mv="urn:schemas-microsoft-com:mac:vml" xmlns:p="http://schemas.openxmlformats.org/presentationml/2006/main" xmlns:c="http://schemas.openxmlformats.org/drawingml/2006/chart" xmlns:dgm="http://schemas.openxmlformats.org/drawingml/2006/diagram" xmlns:o="urn:schemas-microsoft-com:office:office" xmlns:v="urn:schemas-microsoft-com:vml" xmlns:pvml="urn:schemas-microsoft-com:office:powerpoint" xmlns:com="http://schemas.openxmlformats.org/drawingml/2006/compatibility" xmlns:p14="http://schemas.microsoft.com/office/powerpoint/2010/main" xmlns:p15="http://schemas.microsoft.com/office/powerpoint/2012/main" xmlns:ahyp="http://schemas.microsoft.com/office/drawing/2018/hyperlinkcolor">
-  <p:cSld>
-    <p:bg>
-      <p:bgPr>
-        <a:solidFill>
-          <a:schemeClr val="dk1"/>
-        </a:solidFill>
-      </p:bgPr>
-    </p:bg>
-    <p:spTree>
-      <p:nvGrpSpPr>
-        <p:cNvPr id="82" name="Shape 82"/>
-        <p:cNvGrpSpPr/>
-        <p:nvPr/>
-      </p:nvGrpSpPr>
-      <p:grpSpPr>
-        <a:xfrm>
-          <a:off x="0" y="0"/>
-          <a:ext cx="0" cy="0"/>
-          <a:chOff x="0" y="0"/>
-          <a:chExt cx="0" cy="0"/>
-        </a:xfrm>
-      </p:grpSpPr>
-      <p:sp>
-        <p:nvSpPr>
-          <p:cNvPr id="83" name="Google Shape;83;g3ca1bd19589_0_28"/>
-          <p:cNvSpPr txBox="1"/>
-          <p:nvPr>
-            <p:ph type="title"/>
-          </p:nvPr>
-        </p:nvSpPr>
-        <p:spPr>
-          <a:xfrm>
-            <a:off x="152400" y="274637"/>
-            <a:ext cx="8839200" cy="6278700"/>
-          </a:xfrm>
-          <a:prstGeom prst="rect">
-            <a:avLst/>
-          </a:prstGeom>
-          <a:noFill/>
-          <a:ln>
-            <a:noFill/>
-          </a:ln>
-        </p:spPr>
-        <p:txBody>
-          <a:bodyPr anchorCtr="0" anchor="ctr" bIns="45700" lIns="91425" spcFirstLastPara="1" rIns="91425" wrap="square" tIns="45700">
-            <a:noAutofit/>
-          </a:bodyPr>
-          <a:lstStyle/>
-          <a:p>
-            <a:pPr indent="0" lvl="0" marL="0" rtl="0" algn="ctr">
-              <a:lnSpc>
-                <a:spcPct val="125000"/>
-              </a:lnSpc>
-              <a:spcBef>
-                <a:spcPts val="0"/>
-              </a:spcBef>
-              <a:spcAft>
-                <a:spcPts val="0"/>
-              </a:spcAft>
-              <a:buClr>
-                <a:schemeClr val="lt1"/>
-              </a:buClr>
-              <a:buSzPts val="4200"/>
-              <a:buFont typeface="Arial"/>
-              <a:buNone/>
-            </a:pPr>
-            <a:r>
-              <a:rPr lang="en-US" sz="4200">
-                <a:solidFill>
-                  <a:schemeClr val="lt1"/>
-                </a:solidFill>
-              </a:rPr>
-              <a:t>You know my heart </a:t>
-            </a:r>
-            <a:endParaRPr sz="4200">
-              <a:solidFill>
-                <a:schemeClr val="lt1"/>
-              </a:solidFill>
-            </a:endParaRPr>
-          </a:p>
-          <a:p>
-            <a:pPr indent="0" lvl="0" marL="0" rtl="0" algn="ctr">
-              <a:lnSpc>
-                <a:spcPct val="125000"/>
-              </a:lnSpc>
-              <a:spcBef>
-                <a:spcPts val="0"/>
-              </a:spcBef>
-              <a:spcAft>
-                <a:spcPts val="0"/>
-              </a:spcAft>
-              <a:buClr>
-                <a:schemeClr val="lt1"/>
-              </a:buClr>
-              <a:buSzPts val="4200"/>
-              <a:buFont typeface="Arial"/>
-              <a:buNone/>
-            </a:pPr>
-            <a:r>
-              <a:rPr lang="en-US" sz="4200">
-                <a:solidFill>
-                  <a:schemeClr val="lt1"/>
-                </a:solidFill>
-              </a:rPr>
-              <a:t>and You know my ways</a:t>
-            </a:r>
-            <a:endParaRPr sz="4200">
-              <a:solidFill>
-                <a:schemeClr val="lt1"/>
-              </a:solidFill>
-            </a:endParaRPr>
-          </a:p>
-          <a:p>
-            <a:pPr indent="0" lvl="0" marL="0" rtl="0" algn="ctr">
-              <a:lnSpc>
-                <a:spcPct val="125000"/>
-              </a:lnSpc>
-              <a:spcBef>
-                <a:spcPts val="0"/>
-              </a:spcBef>
-              <a:spcAft>
-                <a:spcPts val="0"/>
-              </a:spcAft>
-              <a:buClr>
-                <a:schemeClr val="lt1"/>
-              </a:buClr>
-              <a:buSzPts val="4200"/>
-              <a:buFont typeface="Arial"/>
-              <a:buNone/>
-            </a:pPr>
-            <a:r>
-              <a:rPr lang="en-US" sz="4200">
-                <a:solidFill>
-                  <a:schemeClr val="lt1"/>
-                </a:solidFill>
-              </a:rPr>
-              <a:t>You who formed me </a:t>
-            </a:r>
-            <a:endParaRPr sz="4200">
-              <a:solidFill>
-                <a:schemeClr val="lt1"/>
-              </a:solidFill>
-            </a:endParaRPr>
-          </a:p>
-          <a:p>
-            <a:pPr indent="0" lvl="0" marL="0" rtl="0" algn="ctr">
-              <a:lnSpc>
-                <a:spcPct val="125000"/>
-              </a:lnSpc>
-              <a:spcBef>
-                <a:spcPts val="0"/>
-              </a:spcBef>
-              <a:spcAft>
-                <a:spcPts val="0"/>
-              </a:spcAft>
-              <a:buClr>
-                <a:schemeClr val="lt1"/>
-              </a:buClr>
-              <a:buSzPts val="4200"/>
-              <a:buFont typeface="Arial"/>
-              <a:buNone/>
-            </a:pPr>
-            <a:r>
-              <a:rPr lang="en-US" sz="4200">
-                <a:solidFill>
-                  <a:schemeClr val="lt1"/>
-                </a:solidFill>
-              </a:rPr>
-              <a:t>in my mother's womb</a:t>
-            </a:r>
-            <a:endParaRPr sz="4200">
-              <a:solidFill>
-                <a:schemeClr val="lt1"/>
-              </a:solidFill>
-            </a:endParaRPr>
-          </a:p>
-        </p:txBody>
-      </p:sp>
-    </p:spTree>
-  </p:cSld>
-  <p:clrMapOvr>
-    <a:masterClrMapping/>
-  </p:clrMapOvr>
-</p:sld>
-</file>
-
-<file path=ppt/slides/slide13.xml><?xml version="1.0" encoding="utf-8"?>
-<p:sld xmlns:a="http://schemas.openxmlformats.org/drawingml/2006/main" xmlns:r="http://schemas.openxmlformats.org/officeDocument/2006/relationships" xmlns:mc="http://schemas.openxmlformats.org/markup-compatibility/2006" xmlns:mv="urn:schemas-microsoft-com:mac:vml" xmlns:p="http://schemas.openxmlformats.org/presentationml/2006/main" xmlns:c="http://schemas.openxmlformats.org/drawingml/2006/chart" xmlns:dgm="http://schemas.openxmlformats.org/drawingml/2006/diagram" xmlns:o="urn:schemas-microsoft-com:office:office" xmlns:v="urn:schemas-microsoft-com:vml" xmlns:pvml="urn:schemas-microsoft-com:office:powerpoint" xmlns:com="http://schemas.openxmlformats.org/drawingml/2006/compatibility" xmlns:p14="http://schemas.microsoft.com/office/powerpoint/2010/main" xmlns:p15="http://schemas.microsoft.com/office/powerpoint/2012/main" xmlns:ahyp="http://schemas.microsoft.com/office/drawing/2018/hyperlinkcolor">
-  <p:cSld>
-    <p:bg>
-      <p:bgPr>
-        <a:solidFill>
-          <a:schemeClr val="dk1"/>
-        </a:solidFill>
-      </p:bgPr>
-    </p:bg>
-    <p:spTree>
-      <p:nvGrpSpPr>
-        <p:cNvPr id="87" name="Shape 87"/>
-        <p:cNvGrpSpPr/>
-        <p:nvPr/>
-      </p:nvGrpSpPr>
-      <p:grpSpPr>
-        <a:xfrm>
-          <a:off x="0" y="0"/>
-          <a:ext cx="0" cy="0"/>
-          <a:chOff x="0" y="0"/>
-          <a:chExt cx="0" cy="0"/>
-        </a:xfrm>
-      </p:grpSpPr>
-      <p:sp>
-        <p:nvSpPr>
-          <p:cNvPr id="88" name="Google Shape;88;g3ca1bd19589_0_32"/>
-          <p:cNvSpPr txBox="1"/>
-          <p:nvPr>
-            <p:ph type="title"/>
-          </p:nvPr>
-        </p:nvSpPr>
-        <p:spPr>
-          <a:xfrm>
-            <a:off x="152400" y="274637"/>
-            <a:ext cx="8839200" cy="6278700"/>
-          </a:xfrm>
-          <a:prstGeom prst="rect">
-            <a:avLst/>
-          </a:prstGeom>
-          <a:noFill/>
-          <a:ln>
-            <a:noFill/>
-          </a:ln>
-        </p:spPr>
-        <p:txBody>
-          <a:bodyPr anchorCtr="0" anchor="ctr" bIns="45700" lIns="91425" spcFirstLastPara="1" rIns="91425" wrap="square" tIns="45700">
-            <a:noAutofit/>
-          </a:bodyPr>
-          <a:lstStyle/>
-          <a:p>
-            <a:pPr indent="0" lvl="0" marL="0" rtl="0" algn="ctr">
-              <a:lnSpc>
-                <a:spcPct val="125000"/>
-              </a:lnSpc>
-              <a:spcBef>
-                <a:spcPts val="0"/>
-              </a:spcBef>
-              <a:spcAft>
-                <a:spcPts val="0"/>
-              </a:spcAft>
-              <a:buClr>
-                <a:schemeClr val="lt1"/>
-              </a:buClr>
-              <a:buSzPts val="4200"/>
-              <a:buFont typeface="Arial"/>
-              <a:buNone/>
-            </a:pPr>
-            <a:r>
-              <a:rPr lang="en-US" sz="4200">
-                <a:solidFill>
-                  <a:schemeClr val="lt1"/>
-                </a:solidFill>
-              </a:rPr>
-              <a:t>I live and move in You,</a:t>
-            </a:r>
-            <a:endParaRPr sz="4200">
-              <a:solidFill>
-                <a:schemeClr val="lt1"/>
-              </a:solidFill>
-            </a:endParaRPr>
-          </a:p>
-          <a:p>
-            <a:pPr indent="0" lvl="0" marL="0" rtl="0" algn="ctr">
-              <a:lnSpc>
-                <a:spcPct val="125000"/>
-              </a:lnSpc>
-              <a:spcBef>
-                <a:spcPts val="0"/>
-              </a:spcBef>
-              <a:spcAft>
-                <a:spcPts val="0"/>
-              </a:spcAft>
-              <a:buClr>
-                <a:schemeClr val="lt1"/>
-              </a:buClr>
-              <a:buSzPts val="4200"/>
-              <a:buFont typeface="Arial"/>
-              <a:buNone/>
-            </a:pPr>
-            <a:r>
-              <a:rPr lang="en-US" sz="4200">
-                <a:solidFill>
-                  <a:schemeClr val="lt1"/>
-                </a:solidFill>
-              </a:rPr>
-              <a:t>my whole being thrives in You</a:t>
-            </a:r>
-            <a:endParaRPr sz="4200">
-              <a:solidFill>
-                <a:schemeClr val="lt1"/>
-              </a:solidFill>
-            </a:endParaRPr>
-          </a:p>
-        </p:txBody>
-      </p:sp>
-    </p:spTree>
-  </p:cSld>
-  <p:clrMapOvr>
-    <a:masterClrMapping/>
-  </p:clrMapOvr>
-</p:sld>
-</file>
-
-<file path=ppt/slides/slide14.xml><?xml version="1.0" encoding="utf-8"?>
-<p:sld xmlns:a="http://schemas.openxmlformats.org/drawingml/2006/main" xmlns:r="http://schemas.openxmlformats.org/officeDocument/2006/relationships" xmlns:mc="http://schemas.openxmlformats.org/markup-compatibility/2006" xmlns:mv="urn:schemas-microsoft-com:mac:vml" xmlns:p="http://schemas.openxmlformats.org/presentationml/2006/main" xmlns:c="http://schemas.openxmlformats.org/drawingml/2006/chart" xmlns:dgm="http://schemas.openxmlformats.org/drawingml/2006/diagram" xmlns:o="urn:schemas-microsoft-com:office:office" xmlns:v="urn:schemas-microsoft-com:vml" xmlns:pvml="urn:schemas-microsoft-com:office:powerpoint" xmlns:com="http://schemas.openxmlformats.org/drawingml/2006/compatibility" xmlns:p14="http://schemas.microsoft.com/office/powerpoint/2010/main" xmlns:p15="http://schemas.microsoft.com/office/powerpoint/2012/main" xmlns:ahyp="http://schemas.microsoft.com/office/drawing/2018/hyperlinkcolor">
-  <p:cSld>
-    <p:bg>
-      <p:bgPr>
-        <a:solidFill>
-          <a:schemeClr val="dk1"/>
-        </a:solidFill>
-      </p:bgPr>
-    </p:bg>
-    <p:spTree>
-      <p:nvGrpSpPr>
-        <p:cNvPr id="92" name="Shape 92"/>
-        <p:cNvGrpSpPr/>
-        <p:nvPr/>
-      </p:nvGrpSpPr>
-      <p:grpSpPr>
-        <a:xfrm>
-          <a:off x="0" y="0"/>
-          <a:ext cx="0" cy="0"/>
-          <a:chOff x="0" y="0"/>
-          <a:chExt cx="0" cy="0"/>
-        </a:xfrm>
-      </p:grpSpPr>
-      <p:sp>
-        <p:nvSpPr>
-          <p:cNvPr id="93" name="Google Shape;93;g3ca1bd19589_0_61"/>
-          <p:cNvSpPr txBox="1"/>
-          <p:nvPr>
-            <p:ph type="title"/>
-          </p:nvPr>
-        </p:nvSpPr>
-        <p:spPr>
-          <a:xfrm>
-            <a:off x="152400" y="152400"/>
-            <a:ext cx="8839200" cy="6553200"/>
-          </a:xfrm>
-          <a:prstGeom prst="rect">
-            <a:avLst/>
-          </a:prstGeom>
-          <a:noFill/>
-          <a:ln>
-            <a:noFill/>
-          </a:ln>
-        </p:spPr>
-        <p:txBody>
-          <a:bodyPr anchorCtr="0" anchor="ctr" bIns="45700" lIns="91425" spcFirstLastPara="1" rIns="91425" wrap="square" tIns="45700">
-            <a:noAutofit/>
-          </a:bodyPr>
-          <a:lstStyle/>
-          <a:p>
-            <a:pPr indent="0" lvl="0" marL="0" rtl="0" algn="ctr">
-              <a:lnSpc>
-                <a:spcPct val="125000"/>
-              </a:lnSpc>
-              <a:spcBef>
-                <a:spcPts val="0"/>
-              </a:spcBef>
-              <a:spcAft>
-                <a:spcPts val="0"/>
-              </a:spcAft>
-              <a:buClr>
-                <a:schemeClr val="lt1"/>
-              </a:buClr>
-              <a:buSzPts val="4400"/>
-              <a:buFont typeface="Arial"/>
-              <a:buNone/>
-            </a:pPr>
-            <a:r>
-              <a:rPr lang="en-US">
-                <a:solidFill>
-                  <a:schemeClr val="lt1"/>
-                </a:solidFill>
-              </a:rPr>
-              <a:t>Christ in me arise </a:t>
-            </a:r>
-            <a:endParaRPr>
-              <a:solidFill>
-                <a:schemeClr val="lt1"/>
-              </a:solidFill>
-            </a:endParaRPr>
-          </a:p>
-          <a:p>
-            <a:pPr indent="0" lvl="0" marL="0" rtl="0" algn="ctr">
-              <a:lnSpc>
-                <a:spcPct val="125000"/>
-              </a:lnSpc>
-              <a:spcBef>
-                <a:spcPts val="0"/>
-              </a:spcBef>
-              <a:spcAft>
-                <a:spcPts val="0"/>
-              </a:spcAft>
-              <a:buClr>
-                <a:schemeClr val="lt1"/>
-              </a:buClr>
-              <a:buSzPts val="4400"/>
-              <a:buFont typeface="Arial"/>
-              <a:buNone/>
-            </a:pPr>
-            <a:r>
-              <a:rPr lang="en-US">
-                <a:solidFill>
-                  <a:schemeClr val="lt1"/>
-                </a:solidFill>
-              </a:rPr>
-              <a:t>and dispel all the darkness</a:t>
-            </a:r>
-            <a:endParaRPr>
-              <a:solidFill>
-                <a:schemeClr val="lt1"/>
-              </a:solidFill>
-            </a:endParaRPr>
-          </a:p>
-          <a:p>
-            <a:pPr indent="0" lvl="0" marL="0" rtl="0" algn="ctr">
-              <a:lnSpc>
-                <a:spcPct val="125000"/>
-              </a:lnSpc>
-              <a:spcBef>
-                <a:spcPts val="0"/>
-              </a:spcBef>
-              <a:spcAft>
-                <a:spcPts val="0"/>
-              </a:spcAft>
-              <a:buClr>
-                <a:schemeClr val="lt1"/>
-              </a:buClr>
-              <a:buSzPts val="4400"/>
-              <a:buFont typeface="Arial"/>
-              <a:buNone/>
-            </a:pPr>
-            <a:r>
-              <a:rPr lang="en-US">
-                <a:solidFill>
-                  <a:schemeClr val="lt1"/>
-                </a:solidFill>
-              </a:rPr>
-              <a:t>Christ in me arise with Your </a:t>
-            </a:r>
-            <a:endParaRPr>
-              <a:solidFill>
-                <a:schemeClr val="lt1"/>
-              </a:solidFill>
-            </a:endParaRPr>
-          </a:p>
-          <a:p>
-            <a:pPr indent="0" lvl="0" marL="0" rtl="0" algn="ctr">
-              <a:lnSpc>
-                <a:spcPct val="125000"/>
-              </a:lnSpc>
-              <a:spcBef>
-                <a:spcPts val="0"/>
-              </a:spcBef>
-              <a:spcAft>
-                <a:spcPts val="0"/>
-              </a:spcAft>
-              <a:buClr>
-                <a:schemeClr val="lt1"/>
-              </a:buClr>
-              <a:buSzPts val="4400"/>
-              <a:buFont typeface="Arial"/>
-              <a:buNone/>
-            </a:pPr>
-            <a:r>
-              <a:rPr lang="en-US">
-                <a:solidFill>
-                  <a:schemeClr val="lt1"/>
-                </a:solidFill>
-              </a:rPr>
-              <a:t>power and Your strength</a:t>
-            </a:r>
-            <a:endParaRPr>
-              <a:solidFill>
-                <a:schemeClr val="lt1"/>
-              </a:solidFill>
-            </a:endParaRPr>
-          </a:p>
-        </p:txBody>
-      </p:sp>
-    </p:spTree>
-  </p:cSld>
-  <p:clrMapOvr>
-    <a:masterClrMapping/>
-  </p:clrMapOvr>
-</p:sld>
-</file>
-
-<file path=ppt/slides/slide15.xml><?xml version="1.0" encoding="utf-8"?>
-<p:sld xmlns:a="http://schemas.openxmlformats.org/drawingml/2006/main" xmlns:r="http://schemas.openxmlformats.org/officeDocument/2006/relationships" xmlns:mc="http://schemas.openxmlformats.org/markup-compatibility/2006" xmlns:mv="urn:schemas-microsoft-com:mac:vml" xmlns:p="http://schemas.openxmlformats.org/presentationml/2006/main" xmlns:c="http://schemas.openxmlformats.org/drawingml/2006/chart" xmlns:dgm="http://schemas.openxmlformats.org/drawingml/2006/diagram" xmlns:o="urn:schemas-microsoft-com:office:office" xmlns:v="urn:schemas-microsoft-com:vml" xmlns:pvml="urn:schemas-microsoft-com:office:powerpoint" xmlns:com="http://schemas.openxmlformats.org/drawingml/2006/compatibility" xmlns:p14="http://schemas.microsoft.com/office/powerpoint/2010/main" xmlns:p15="http://schemas.microsoft.com/office/powerpoint/2012/main" xmlns:ahyp="http://schemas.microsoft.com/office/drawing/2018/hyperlinkcolor">
-  <p:cSld>
-    <p:bg>
-      <p:bgPr>
-        <a:solidFill>
-          <a:schemeClr val="dk1"/>
-        </a:solidFill>
-      </p:bgPr>
-    </p:bg>
-    <p:spTree>
-      <p:nvGrpSpPr>
-        <p:cNvPr id="97" name="Shape 97"/>
-        <p:cNvGrpSpPr/>
-        <p:nvPr/>
-      </p:nvGrpSpPr>
-      <p:grpSpPr>
-        <a:xfrm>
-          <a:off x="0" y="0"/>
-          <a:ext cx="0" cy="0"/>
-          <a:chOff x="0" y="0"/>
-          <a:chExt cx="0" cy="0"/>
-        </a:xfrm>
-      </p:grpSpPr>
-      <p:sp>
-        <p:nvSpPr>
-          <p:cNvPr id="98" name="Google Shape;98;g3ca1bd19589_0_65"/>
-          <p:cNvSpPr txBox="1"/>
-          <p:nvPr>
-            <p:ph type="title"/>
-          </p:nvPr>
-        </p:nvSpPr>
-        <p:spPr>
-          <a:xfrm>
-            <a:off x="152400" y="274637"/>
-            <a:ext cx="8839200" cy="6278700"/>
-          </a:xfrm>
-          <a:prstGeom prst="rect">
-            <a:avLst/>
-          </a:prstGeom>
-          <a:noFill/>
-          <a:ln>
-            <a:noFill/>
-          </a:ln>
-        </p:spPr>
-        <p:txBody>
-          <a:bodyPr anchorCtr="0" anchor="ctr" bIns="45700" lIns="91425" spcFirstLastPara="1" rIns="91425" wrap="square" tIns="45700">
-            <a:noAutofit/>
-          </a:bodyPr>
-          <a:lstStyle/>
-          <a:p>
-            <a:pPr indent="0" lvl="0" marL="0" rtl="0" algn="ctr">
-              <a:lnSpc>
-                <a:spcPct val="125000"/>
-              </a:lnSpc>
-              <a:spcBef>
-                <a:spcPts val="0"/>
-              </a:spcBef>
-              <a:spcAft>
-                <a:spcPts val="0"/>
-              </a:spcAft>
-              <a:buClr>
-                <a:schemeClr val="lt1"/>
-              </a:buClr>
-              <a:buSzPts val="4200"/>
-              <a:buFont typeface="Arial"/>
-              <a:buNone/>
-            </a:pPr>
-            <a:r>
-              <a:rPr lang="en-US" sz="4200">
-                <a:solidFill>
-                  <a:schemeClr val="lt1"/>
-                </a:solidFill>
-              </a:rPr>
-              <a:t>Christ in me pour out </a:t>
-            </a:r>
-            <a:endParaRPr sz="4200">
-              <a:solidFill>
-                <a:schemeClr val="lt1"/>
-              </a:solidFill>
-            </a:endParaRPr>
-          </a:p>
-          <a:p>
-            <a:pPr indent="0" lvl="0" marL="0" rtl="0" algn="ctr">
-              <a:lnSpc>
-                <a:spcPct val="125000"/>
-              </a:lnSpc>
-              <a:spcBef>
-                <a:spcPts val="0"/>
-              </a:spcBef>
-              <a:spcAft>
-                <a:spcPts val="0"/>
-              </a:spcAft>
-              <a:buClr>
-                <a:schemeClr val="lt1"/>
-              </a:buClr>
-              <a:buSzPts val="4200"/>
-              <a:buFont typeface="Arial"/>
-              <a:buNone/>
-            </a:pPr>
-            <a:r>
-              <a:rPr lang="en-US" sz="4200">
-                <a:solidFill>
-                  <a:schemeClr val="lt1"/>
-                </a:solidFill>
-              </a:rPr>
-              <a:t>Your blessing and healing</a:t>
-            </a:r>
-            <a:endParaRPr sz="4200">
-              <a:solidFill>
-                <a:schemeClr val="lt1"/>
-              </a:solidFill>
-            </a:endParaRPr>
-          </a:p>
-          <a:p>
-            <a:pPr indent="0" lvl="0" marL="0" rtl="0" algn="ctr">
-              <a:lnSpc>
-                <a:spcPct val="125000"/>
-              </a:lnSpc>
-              <a:spcBef>
-                <a:spcPts val="0"/>
-              </a:spcBef>
-              <a:spcAft>
-                <a:spcPts val="0"/>
-              </a:spcAft>
-              <a:buClr>
-                <a:schemeClr val="lt1"/>
-              </a:buClr>
-              <a:buSzPts val="4200"/>
-              <a:buFont typeface="Arial"/>
-              <a:buNone/>
-            </a:pPr>
-            <a:r>
-              <a:rPr lang="en-US" sz="4200">
-                <a:solidFill>
-                  <a:schemeClr val="lt1"/>
-                </a:solidFill>
-              </a:rPr>
-              <a:t>Christ in me arise (3x)</a:t>
-            </a:r>
-            <a:endParaRPr sz="4200">
-              <a:solidFill>
-                <a:schemeClr val="lt1"/>
-              </a:solidFill>
-            </a:endParaRPr>
-          </a:p>
-          <a:p>
-            <a:pPr indent="0" lvl="0" marL="0" rtl="0" algn="ctr">
-              <a:lnSpc>
-                <a:spcPct val="125000"/>
-              </a:lnSpc>
-              <a:spcBef>
-                <a:spcPts val="0"/>
-              </a:spcBef>
-              <a:spcAft>
-                <a:spcPts val="0"/>
-              </a:spcAft>
-              <a:buClr>
-                <a:schemeClr val="lt1"/>
-              </a:buClr>
-              <a:buSzPts val="4200"/>
-              <a:buFont typeface="Arial"/>
-              <a:buNone/>
-            </a:pPr>
-            <a:r>
-              <a:rPr lang="en-US" sz="4200">
-                <a:solidFill>
-                  <a:schemeClr val="lt1"/>
-                </a:solidFill>
-              </a:rPr>
-              <a:t>and I shall rise with You</a:t>
-            </a:r>
-            <a:endParaRPr sz="4200">
-              <a:solidFill>
-                <a:schemeClr val="lt1"/>
-              </a:solidFill>
             </a:endParaRPr>
           </a:p>
         </p:txBody>
@@ -7962,7 +6072,7 @@
                   <a:schemeClr val="lt1"/>
                 </a:solidFill>
               </a:rPr>
-              <a:t>Christ in me arise </a:t>
+              <a:t>The Lord is my shepherd;</a:t>
             </a:r>
             <a:endParaRPr>
               <a:solidFill>
@@ -7994,7 +6104,7 @@
                   <a:schemeClr val="lt1"/>
                 </a:solidFill>
               </a:rPr>
-              <a:t>and dispel all the darkness</a:t>
+              <a:t>there is nothing I shall want.</a:t>
             </a:r>
             <a:endParaRPr>
               <a:solidFill>
@@ -8021,46 +6131,14 @@
               <a:buNone/>
             </a:pPr>
             <a:r>
-              <a:rPr lang="en-US">
+              <a:rPr i="1" lang="en-US">
                 <a:solidFill>
                   <a:schemeClr val="lt1"/>
                 </a:solidFill>
               </a:rPr>
-              <a:t>Christ in me arise with Your </a:t>
+              <a:t>(sing 4x)</a:t>
             </a:r>
-            <a:endParaRPr>
-              <a:solidFill>
-                <a:schemeClr val="lt1"/>
-              </a:solidFill>
-            </a:endParaRPr>
-          </a:p>
-          <a:p>
-            <a:pPr indent="0" lvl="0" marL="0" rtl="0" algn="ctr">
-              <a:lnSpc>
-                <a:spcPct val="125000"/>
-              </a:lnSpc>
-              <a:spcBef>
-                <a:spcPts val="0"/>
-              </a:spcBef>
-              <a:spcAft>
-                <a:spcPts val="0"/>
-              </a:spcAft>
-              <a:buClr>
-                <a:schemeClr val="lt1"/>
-              </a:buClr>
-              <a:buSzPts val="4400"/>
-              <a:buFont typeface="Arial"/>
-              <a:buNone/>
-            </a:pPr>
-            <a:r>
-              <a:rPr lang="en-US">
-                <a:solidFill>
-                  <a:schemeClr val="lt1"/>
-                </a:solidFill>
-              </a:rPr>
-              <a:t>power and Your strength</a:t>
-            </a:r>
-            <a:endParaRPr>
+            <a:endParaRPr i="1">
               <a:solidFill>
                 <a:schemeClr val="lt1"/>
               </a:solidFill>
@@ -8150,7 +6228,7 @@
                   <a:schemeClr val="lt1"/>
                 </a:solidFill>
               </a:rPr>
-              <a:t>Christ in me pour out </a:t>
+              <a:t>He lets me rest</a:t>
             </a:r>
             <a:endParaRPr sz="4200">
               <a:solidFill>
@@ -8182,7 +6260,7 @@
                   <a:schemeClr val="lt1"/>
                 </a:solidFill>
               </a:rPr>
-              <a:t>Your blessing and healing</a:t>
+              <a:t>In open fields so green</a:t>
             </a:r>
             <a:endParaRPr sz="4200">
               <a:solidFill>
@@ -8214,39 +6292,7 @@
                   <a:schemeClr val="lt1"/>
                 </a:solidFill>
               </a:rPr>
-              <a:t>Christ in me arise </a:t>
-            </a:r>
-            <a:endParaRPr sz="4200">
-              <a:solidFill>
-                <a:schemeClr val="lt1"/>
-              </a:solidFill>
-            </a:endParaRPr>
-          </a:p>
-          <a:p>
-            <a:pPr indent="0" lvl="0" marL="0" rtl="0" algn="ctr">
-              <a:lnSpc>
-                <a:spcPct val="125000"/>
-              </a:lnSpc>
-              <a:spcBef>
-                <a:spcPts val="0"/>
-              </a:spcBef>
-              <a:spcAft>
-                <a:spcPts val="0"/>
-              </a:spcAft>
-              <a:buClr>
-                <a:schemeClr val="lt1"/>
-              </a:buClr>
-              <a:buSzPts val="4200"/>
-              <a:buFont typeface="Arial"/>
-              <a:buNone/>
-            </a:pPr>
-            <a:r>
-              <a:rPr lang="en-US" sz="4200">
-                <a:solidFill>
-                  <a:schemeClr val="lt1"/>
-                </a:solidFill>
-              </a:rPr>
-              <a:t>and I shall rise with You</a:t>
+              <a:t>He leads me to the quiet stream</a:t>
             </a:r>
             <a:endParaRPr sz="4200">
               <a:solidFill>
@@ -8338,7 +6384,7 @@
                   <a:schemeClr val="lt1"/>
                 </a:solidFill>
               </a:rPr>
-              <a:t>Be now my vision </a:t>
+              <a:t>He gives me strength</a:t>
             </a:r>
             <a:endParaRPr sz="4200">
               <a:solidFill>
@@ -8370,7 +6416,7 @@
                   <a:schemeClr val="lt1"/>
                 </a:solidFill>
               </a:rPr>
-              <a:t>open these eyes</a:t>
+              <a:t>And guides me in his ways</a:t>
             </a:r>
             <a:endParaRPr sz="4200">
               <a:solidFill>
@@ -8402,7 +6448,7 @@
                   <a:schemeClr val="lt1"/>
                 </a:solidFill>
               </a:rPr>
-              <a:t>Showing me all that I must see</a:t>
+              <a:t>He renews his promises each day</a:t>
             </a:r>
             <a:endParaRPr sz="4200">
               <a:solidFill>
@@ -8446,7 +6492,7 @@
       </p:grpSpPr>
       <p:sp>
         <p:nvSpPr>
-          <p:cNvPr id="48" name="Google Shape;48;p5"/>
+          <p:cNvPr id="48" name="Google Shape;48;g3caa58df123_0_0"/>
           <p:cNvSpPr txBox="1"/>
           <p:nvPr>
             <p:ph type="title"/>
@@ -8484,19 +6530,19 @@
               <a:buClr>
                 <a:schemeClr val="lt1"/>
               </a:buClr>
-              <a:buSzPts val="4200"/>
+              <a:buSzPts val="4400"/>
               <a:buFont typeface="Arial"/>
               <a:buNone/>
             </a:pPr>
             <a:r>
-              <a:rPr lang="en-US" sz="4200">
+              <a:rPr lang="en-US">
                 <a:solidFill>
                   <a:schemeClr val="lt1"/>
                 </a:solidFill>
               </a:rPr>
-              <a:t>Onward to the kingdom</a:t>
+              <a:t>The Lord is my shepherd;</a:t>
             </a:r>
-            <a:endParaRPr sz="4200">
+            <a:endParaRPr>
               <a:solidFill>
                 <a:schemeClr val="lt1"/>
               </a:solidFill>
@@ -8516,19 +6562,19 @@
               <a:buClr>
                 <a:schemeClr val="lt1"/>
               </a:buClr>
-              <a:buSzPts val="4200"/>
+              <a:buSzPts val="4400"/>
               <a:buFont typeface="Arial"/>
               <a:buNone/>
             </a:pPr>
             <a:r>
-              <a:rPr lang="en-US" sz="4200">
+              <a:rPr lang="en-US">
                 <a:solidFill>
                   <a:schemeClr val="lt1"/>
                 </a:solidFill>
               </a:rPr>
-              <a:t>You are the way</a:t>
+              <a:t>there is nothing I shall want.</a:t>
             </a:r>
-            <a:endParaRPr sz="4200">
+            <a:endParaRPr>
               <a:solidFill>
                 <a:schemeClr val="lt1"/>
               </a:solidFill>
@@ -8548,19 +6594,19 @@
               <a:buClr>
                 <a:schemeClr val="lt1"/>
               </a:buClr>
-              <a:buSzPts val="4200"/>
+              <a:buSzPts val="4400"/>
               <a:buFont typeface="Arial"/>
               <a:buNone/>
             </a:pPr>
             <a:r>
-              <a:rPr lang="en-US" sz="4200">
+              <a:rPr i="1" lang="en-US">
                 <a:solidFill>
                   <a:schemeClr val="lt1"/>
                 </a:solidFill>
               </a:rPr>
-              <a:t>Arise in me and I shall rise with You</a:t>
+              <a:t>(sing 2x)</a:t>
             </a:r>
-            <a:endParaRPr sz="4200">
+            <a:endParaRPr i="1">
               <a:solidFill>
                 <a:schemeClr val="lt1"/>
               </a:solidFill>
@@ -8602,7 +6648,7 @@
       </p:grpSpPr>
       <p:sp>
         <p:nvSpPr>
-          <p:cNvPr id="53" name="Google Shape;53;g3ca1bd19589_0_45"/>
+          <p:cNvPr id="53" name="Google Shape;53;p5"/>
           <p:cNvSpPr txBox="1"/>
           <p:nvPr>
             <p:ph type="title"/>
@@ -8640,19 +6686,19 @@
               <a:buClr>
                 <a:schemeClr val="lt1"/>
               </a:buClr>
-              <a:buSzPts val="4400"/>
+              <a:buSzPts val="4200"/>
               <a:buFont typeface="Arial"/>
               <a:buNone/>
             </a:pPr>
             <a:r>
-              <a:rPr lang="en-US">
+              <a:rPr lang="en-US" sz="4200">
                 <a:solidFill>
                   <a:schemeClr val="lt1"/>
                 </a:solidFill>
               </a:rPr>
-              <a:t>Christ in me arise </a:t>
+              <a:t>He is my guide</a:t>
             </a:r>
-            <a:endParaRPr>
+            <a:endParaRPr sz="4200">
               <a:solidFill>
                 <a:schemeClr val="lt1"/>
               </a:solidFill>
@@ -8672,19 +6718,19 @@
               <a:buClr>
                 <a:schemeClr val="lt1"/>
               </a:buClr>
-              <a:buSzPts val="4400"/>
+              <a:buSzPts val="4200"/>
               <a:buFont typeface="Arial"/>
               <a:buNone/>
             </a:pPr>
             <a:r>
-              <a:rPr lang="en-US">
+              <a:rPr lang="en-US" sz="4200">
                 <a:solidFill>
                   <a:schemeClr val="lt1"/>
                 </a:solidFill>
               </a:rPr>
-              <a:t>and dispel all the darkness</a:t>
+              <a:t>My shepherd and my king</a:t>
             </a:r>
-            <a:endParaRPr>
+            <a:endParaRPr sz="4200">
               <a:solidFill>
                 <a:schemeClr val="lt1"/>
               </a:solidFill>
@@ -8704,51 +6750,19 @@
               <a:buClr>
                 <a:schemeClr val="lt1"/>
               </a:buClr>
-              <a:buSzPts val="4400"/>
+              <a:buSzPts val="4200"/>
               <a:buFont typeface="Arial"/>
               <a:buNone/>
             </a:pPr>
             <a:r>
-              <a:rPr lang="en-US">
+              <a:rPr lang="en-US" sz="4200">
                 <a:solidFill>
                   <a:schemeClr val="lt1"/>
                 </a:solidFill>
               </a:rPr>
-              <a:t>Christ in me arise with Your </a:t>
+              <a:t>And in my fear he offers peace</a:t>
             </a:r>
-            <a:endParaRPr>
-              <a:solidFill>
-                <a:schemeClr val="lt1"/>
-              </a:solidFill>
-            </a:endParaRPr>
-          </a:p>
-          <a:p>
-            <a:pPr indent="0" lvl="0" marL="0" rtl="0" algn="ctr">
-              <a:lnSpc>
-                <a:spcPct val="125000"/>
-              </a:lnSpc>
-              <a:spcBef>
-                <a:spcPts val="0"/>
-              </a:spcBef>
-              <a:spcAft>
-                <a:spcPts val="0"/>
-              </a:spcAft>
-              <a:buClr>
-                <a:schemeClr val="lt1"/>
-              </a:buClr>
-              <a:buSzPts val="4400"/>
-              <a:buFont typeface="Arial"/>
-              <a:buNone/>
-            </a:pPr>
-            <a:r>
-              <a:rPr lang="en-US">
-                <a:solidFill>
-                  <a:schemeClr val="lt1"/>
-                </a:solidFill>
-              </a:rPr>
-              <a:t>power and Your strength</a:t>
-            </a:r>
-            <a:endParaRPr>
+            <a:endParaRPr sz="4200">
               <a:solidFill>
                 <a:schemeClr val="lt1"/>
               </a:solidFill>
@@ -8790,7 +6804,7 @@
       </p:grpSpPr>
       <p:sp>
         <p:nvSpPr>
-          <p:cNvPr id="58" name="Google Shape;58;g3ca1bd19589_0_4"/>
+          <p:cNvPr id="58" name="Google Shape;58;g3ca1bd19589_0_45"/>
           <p:cNvSpPr txBox="1"/>
           <p:nvPr>
             <p:ph type="title"/>
@@ -8798,8 +6812,8 @@
         </p:nvSpPr>
         <p:spPr>
           <a:xfrm>
-            <a:off x="152400" y="274637"/>
-            <a:ext cx="8839200" cy="6278700"/>
+            <a:off x="152400" y="152400"/>
+            <a:ext cx="8839200" cy="6553200"/>
           </a:xfrm>
           <a:prstGeom prst="rect">
             <a:avLst/>
@@ -8828,19 +6842,19 @@
               <a:buClr>
                 <a:schemeClr val="lt1"/>
               </a:buClr>
-              <a:buSzPts val="4200"/>
+              <a:buSzPts val="4400"/>
               <a:buFont typeface="Arial"/>
               <a:buNone/>
             </a:pPr>
             <a:r>
-              <a:rPr lang="en-US" sz="4200">
+              <a:rPr lang="en-US">
                 <a:solidFill>
                   <a:schemeClr val="lt1"/>
                 </a:solidFill>
               </a:rPr>
-              <a:t>Christ in me pour out </a:t>
+              <a:t>Though I walk through the valley</a:t>
             </a:r>
-            <a:endParaRPr sz="4200">
+            <a:endParaRPr>
               <a:solidFill>
                 <a:schemeClr val="lt1"/>
               </a:solidFill>
@@ -8860,19 +6874,19 @@
               <a:buClr>
                 <a:schemeClr val="lt1"/>
               </a:buClr>
-              <a:buSzPts val="4200"/>
+              <a:buSzPts val="4400"/>
               <a:buFont typeface="Arial"/>
               <a:buNone/>
             </a:pPr>
             <a:r>
-              <a:rPr lang="en-US" sz="4200">
+              <a:rPr lang="en-US">
                 <a:solidFill>
                   <a:schemeClr val="lt1"/>
                 </a:solidFill>
               </a:rPr>
-              <a:t>Your blessing and healing</a:t>
+              <a:t>I will not be afraid</a:t>
             </a:r>
-            <a:endParaRPr sz="4200">
+            <a:endParaRPr>
               <a:solidFill>
                 <a:schemeClr val="lt1"/>
               </a:solidFill>
@@ -8892,51 +6906,19 @@
               <a:buClr>
                 <a:schemeClr val="lt1"/>
               </a:buClr>
-              <a:buSzPts val="4200"/>
+              <a:buSzPts val="4400"/>
               <a:buFont typeface="Arial"/>
               <a:buNone/>
             </a:pPr>
             <a:r>
-              <a:rPr lang="en-US" sz="4200">
+              <a:rPr lang="en-US">
                 <a:solidFill>
                   <a:schemeClr val="lt1"/>
                 </a:solidFill>
               </a:rPr>
-              <a:t>Christ in me arise </a:t>
+              <a:t>You will protect me; I’ll be saved</a:t>
             </a:r>
-            <a:endParaRPr sz="4200">
-              <a:solidFill>
-                <a:schemeClr val="lt1"/>
-              </a:solidFill>
-            </a:endParaRPr>
-          </a:p>
-          <a:p>
-            <a:pPr indent="0" lvl="0" marL="0" rtl="0" algn="ctr">
-              <a:lnSpc>
-                <a:spcPct val="125000"/>
-              </a:lnSpc>
-              <a:spcBef>
-                <a:spcPts val="0"/>
-              </a:spcBef>
-              <a:spcAft>
-                <a:spcPts val="0"/>
-              </a:spcAft>
-              <a:buClr>
-                <a:schemeClr val="lt1"/>
-              </a:buClr>
-              <a:buSzPts val="4200"/>
-              <a:buFont typeface="Arial"/>
-              <a:buNone/>
-            </a:pPr>
-            <a:r>
-              <a:rPr lang="en-US" sz="4200">
-                <a:solidFill>
-                  <a:schemeClr val="lt1"/>
-                </a:solidFill>
-              </a:rPr>
-              <a:t>and I shall rise with You</a:t>
-            </a:r>
-            <a:endParaRPr sz="4200">
+            <a:endParaRPr>
               <a:solidFill>
                 <a:schemeClr val="lt1"/>
               </a:solidFill>
@@ -8978,7 +6960,7 @@
       </p:grpSpPr>
       <p:sp>
         <p:nvSpPr>
-          <p:cNvPr id="63" name="Google Shape;63;g3ca1bd19589_0_8"/>
+          <p:cNvPr id="63" name="Google Shape;63;g3caa58df123_0_4"/>
           <p:cNvSpPr txBox="1"/>
           <p:nvPr>
             <p:ph type="title"/>
@@ -8986,8 +6968,8 @@
         </p:nvSpPr>
         <p:spPr>
           <a:xfrm>
-            <a:off x="152400" y="274637"/>
-            <a:ext cx="8839200" cy="6278700"/>
+            <a:off x="152400" y="152400"/>
+            <a:ext cx="8839200" cy="6553200"/>
           </a:xfrm>
           <a:prstGeom prst="rect">
             <a:avLst/>
@@ -9016,19 +6998,19 @@
               <a:buClr>
                 <a:schemeClr val="lt1"/>
               </a:buClr>
-              <a:buSzPts val="4200"/>
+              <a:buSzPts val="4400"/>
               <a:buFont typeface="Arial"/>
               <a:buNone/>
             </a:pPr>
             <a:r>
-              <a:rPr lang="en-US" sz="4200">
+              <a:rPr lang="en-US">
                 <a:solidFill>
                   <a:schemeClr val="lt1"/>
                 </a:solidFill>
               </a:rPr>
-              <a:t>Be now my footsteps </a:t>
+              <a:t>The Lord is my shepherd;</a:t>
             </a:r>
-            <a:endParaRPr sz="4200">
+            <a:endParaRPr>
               <a:solidFill>
                 <a:schemeClr val="lt1"/>
               </a:solidFill>
@@ -9048,19 +7030,19 @@
               <a:buClr>
                 <a:schemeClr val="lt1"/>
               </a:buClr>
-              <a:buSzPts val="4200"/>
+              <a:buSzPts val="4400"/>
               <a:buFont typeface="Arial"/>
               <a:buNone/>
             </a:pPr>
             <a:r>
-              <a:rPr lang="en-US" sz="4200">
+              <a:rPr lang="en-US">
                 <a:solidFill>
                   <a:schemeClr val="lt1"/>
                 </a:solidFill>
               </a:rPr>
-              <a:t>leading the way</a:t>
+              <a:t>there is nothing I shall want.</a:t>
             </a:r>
-            <a:endParaRPr sz="4200">
+            <a:endParaRPr>
               <a:solidFill>
                 <a:schemeClr val="lt1"/>
               </a:solidFill>
@@ -9080,175 +7062,19 @@
               <a:buClr>
                 <a:schemeClr val="lt1"/>
               </a:buClr>
-              <a:buSzPts val="4200"/>
+              <a:buSzPts val="4400"/>
               <a:buFont typeface="Arial"/>
               <a:buNone/>
             </a:pPr>
             <a:r>
-              <a:rPr lang="en-US" sz="4200">
+              <a:rPr i="1" lang="en-US">
                 <a:solidFill>
                   <a:schemeClr val="lt1"/>
                 </a:solidFill>
               </a:rPr>
-              <a:t>Taking me where I must go</a:t>
+              <a:t>(sing 4x)</a:t>
             </a:r>
-            <a:endParaRPr sz="4200">
-              <a:solidFill>
-                <a:schemeClr val="lt1"/>
-              </a:solidFill>
-            </a:endParaRPr>
-          </a:p>
-        </p:txBody>
-      </p:sp>
-    </p:spTree>
-  </p:cSld>
-  <p:clrMapOvr>
-    <a:masterClrMapping/>
-  </p:clrMapOvr>
-</p:sld>
-</file>
-
-<file path=ppt/slides/slide9.xml><?xml version="1.0" encoding="utf-8"?>
-<p:sld xmlns:a="http://schemas.openxmlformats.org/drawingml/2006/main" xmlns:r="http://schemas.openxmlformats.org/officeDocument/2006/relationships" xmlns:mc="http://schemas.openxmlformats.org/markup-compatibility/2006" xmlns:mv="urn:schemas-microsoft-com:mac:vml" xmlns:p="http://schemas.openxmlformats.org/presentationml/2006/main" xmlns:c="http://schemas.openxmlformats.org/drawingml/2006/chart" xmlns:dgm="http://schemas.openxmlformats.org/drawingml/2006/diagram" xmlns:o="urn:schemas-microsoft-com:office:office" xmlns:v="urn:schemas-microsoft-com:vml" xmlns:pvml="urn:schemas-microsoft-com:office:powerpoint" xmlns:com="http://schemas.openxmlformats.org/drawingml/2006/compatibility" xmlns:p14="http://schemas.microsoft.com/office/powerpoint/2010/main" xmlns:p15="http://schemas.microsoft.com/office/powerpoint/2012/main" xmlns:ahyp="http://schemas.microsoft.com/office/drawing/2018/hyperlinkcolor">
-  <p:cSld>
-    <p:bg>
-      <p:bgPr>
-        <a:solidFill>
-          <a:schemeClr val="dk1"/>
-        </a:solidFill>
-      </p:bgPr>
-    </p:bg>
-    <p:spTree>
-      <p:nvGrpSpPr>
-        <p:cNvPr id="67" name="Shape 67"/>
-        <p:cNvGrpSpPr/>
-        <p:nvPr/>
-      </p:nvGrpSpPr>
-      <p:grpSpPr>
-        <a:xfrm>
-          <a:off x="0" y="0"/>
-          <a:ext cx="0" cy="0"/>
-          <a:chOff x="0" y="0"/>
-          <a:chExt cx="0" cy="0"/>
-        </a:xfrm>
-      </p:grpSpPr>
-      <p:sp>
-        <p:nvSpPr>
-          <p:cNvPr id="68" name="Google Shape;68;g3ca1bd19589_0_12"/>
-          <p:cNvSpPr txBox="1"/>
-          <p:nvPr>
-            <p:ph type="title"/>
-          </p:nvPr>
-        </p:nvSpPr>
-        <p:spPr>
-          <a:xfrm>
-            <a:off x="152400" y="274637"/>
-            <a:ext cx="8839200" cy="6278700"/>
-          </a:xfrm>
-          <a:prstGeom prst="rect">
-            <a:avLst/>
-          </a:prstGeom>
-          <a:noFill/>
-          <a:ln>
-            <a:noFill/>
-          </a:ln>
-        </p:spPr>
-        <p:txBody>
-          <a:bodyPr anchorCtr="0" anchor="ctr" bIns="45700" lIns="91425" spcFirstLastPara="1" rIns="91425" wrap="square" tIns="45700">
-            <a:noAutofit/>
-          </a:bodyPr>
-          <a:lstStyle/>
-          <a:p>
-            <a:pPr indent="0" lvl="0" marL="0" rtl="0" algn="ctr">
-              <a:lnSpc>
-                <a:spcPct val="125000"/>
-              </a:lnSpc>
-              <a:spcBef>
-                <a:spcPts val="0"/>
-              </a:spcBef>
-              <a:spcAft>
-                <a:spcPts val="0"/>
-              </a:spcAft>
-              <a:buClr>
-                <a:schemeClr val="lt1"/>
-              </a:buClr>
-              <a:buSzPts val="4200"/>
-              <a:buFont typeface="Arial"/>
-              <a:buNone/>
-            </a:pPr>
-            <a:r>
-              <a:rPr lang="en-US" sz="4200">
-                <a:solidFill>
-                  <a:schemeClr val="lt1"/>
-                </a:solidFill>
-              </a:rPr>
-              <a:t>Onward to the kingdom </a:t>
-            </a:r>
-            <a:endParaRPr sz="4200">
-              <a:solidFill>
-                <a:schemeClr val="lt1"/>
-              </a:solidFill>
-            </a:endParaRPr>
-          </a:p>
-          <a:p>
-            <a:pPr indent="0" lvl="0" marL="0" rtl="0" algn="ctr">
-              <a:lnSpc>
-                <a:spcPct val="125000"/>
-              </a:lnSpc>
-              <a:spcBef>
-                <a:spcPts val="0"/>
-              </a:spcBef>
-              <a:spcAft>
-                <a:spcPts val="0"/>
-              </a:spcAft>
-              <a:buClr>
-                <a:schemeClr val="lt1"/>
-              </a:buClr>
-              <a:buSzPts val="4200"/>
-              <a:buFont typeface="Arial"/>
-              <a:buNone/>
-            </a:pPr>
-            <a:r>
-              <a:rPr lang="en-US" sz="4200">
-                <a:solidFill>
-                  <a:schemeClr val="lt1"/>
-                </a:solidFill>
-              </a:rPr>
-              <a:t>You are the way</a:t>
-            </a:r>
-            <a:endParaRPr sz="4200">
-              <a:solidFill>
-                <a:schemeClr val="lt1"/>
-              </a:solidFill>
-            </a:endParaRPr>
-          </a:p>
-          <a:p>
-            <a:pPr indent="0" lvl="0" marL="0" rtl="0" algn="ctr">
-              <a:lnSpc>
-                <a:spcPct val="125000"/>
-              </a:lnSpc>
-              <a:spcBef>
-                <a:spcPts val="0"/>
-              </a:spcBef>
-              <a:spcAft>
-                <a:spcPts val="0"/>
-              </a:spcAft>
-              <a:buClr>
-                <a:schemeClr val="lt1"/>
-              </a:buClr>
-              <a:buSzPts val="4200"/>
-              <a:buFont typeface="Arial"/>
-              <a:buNone/>
-            </a:pPr>
-            <a:r>
-              <a:rPr lang="en-US" sz="4200">
-                <a:solidFill>
-                  <a:schemeClr val="lt1"/>
-                </a:solidFill>
-              </a:rPr>
-              <a:t>Arise in me and I shall rise with You</a:t>
-            </a:r>
-            <a:endParaRPr sz="4200">
+            <a:endParaRPr i="1">
               <a:solidFill>
                 <a:schemeClr val="lt1"/>
               </a:solidFill>
